--- a/Employee-Record-Management-System (1).pptx
+++ b/Employee-Record-Management-System (1).pptx
@@ -5,7 +5,7 @@
     <p:sldMasterId id="2147483648" r:id="rId1"/>
   </p:sldMasterIdLst>
   <p:notesMasterIdLst>
-    <p:notesMasterId r:id="rId11"/>
+    <p:notesMasterId r:id="rId13"/>
   </p:notesMasterIdLst>
   <p:sldIdLst>
     <p:sldId id="266" r:id="rId2"/>
@@ -15,23 +15,25 @@
     <p:sldId id="260" r:id="rId6"/>
     <p:sldId id="261" r:id="rId7"/>
     <p:sldId id="262" r:id="rId8"/>
-    <p:sldId id="264" r:id="rId9"/>
-    <p:sldId id="265" r:id="rId10"/>
+    <p:sldId id="267" r:id="rId9"/>
+    <p:sldId id="264" r:id="rId10"/>
+    <p:sldId id="265" r:id="rId11"/>
+    <p:sldId id="268" r:id="rId12"/>
   </p:sldIdLst>
   <p:sldSz cx="9144000" cy="5143500" type="screen16x9"/>
   <p:notesSz cx="5143500" cy="9144000"/>
   <p:embeddedFontLst>
     <p:embeddedFont>
       <p:font typeface="Open Sans" panose="020B0606030504020204" pitchFamily="34" charset="0"/>
-      <p:regular r:id="rId12"/>
+      <p:regular r:id="rId14"/>
     </p:embeddedFont>
     <p:embeddedFont>
       <p:font typeface="Open Sans Bold" panose="020B0604020202020204" charset="0"/>
-      <p:regular r:id="rId13"/>
+      <p:regular r:id="rId15"/>
     </p:embeddedFont>
     <p:embeddedFont>
       <p:font typeface="Unbounded Bold" panose="020B0604020202020204" charset="0"/>
-      <p:regular r:id="rId14"/>
+      <p:regular r:id="rId16"/>
     </p:embeddedFont>
   </p:embeddedFontLst>
   <p:defaultTextStyle>
@@ -912,7 +914,7 @@
           <a:p>
             <a:fld id="{F7021451-1387-4CA6-816F-3879F97B5CBC}" type="slidenum">
               <a:rPr lang="en-US"/>
-              <a:t>8</a:t>
+              <a:t>9</a:t>
             </a:fld>
             <a:endParaRPr lang="en-US"/>
           </a:p>
@@ -996,7 +998,7 @@
           <a:p>
             <a:fld id="{F7021451-1387-4CA6-816F-3879F97B5CBC}" type="slidenum">
               <a:rPr lang="en-US"/>
-              <a:t>9</a:t>
+              <a:t>10</a:t>
             </a:fld>
             <a:endParaRPr lang="en-US"/>
           </a:p>
@@ -1705,8 +1707,8 @@
         </p:nvSpPr>
         <p:spPr>
           <a:xfrm>
-            <a:off x="3925119" y="3884625"/>
-            <a:ext cx="1186681" cy="360804"/>
+            <a:off x="3925119" y="3884624"/>
+            <a:ext cx="1271883" cy="635125"/>
           </a:xfrm>
           <a:prstGeom prst="rect">
             <a:avLst/>
@@ -1734,6 +1736,25 @@
                 <a:cs typeface="Open Sans" pitchFamily="34" charset="-120"/>
               </a:rPr>
               <a:t>DAARANI B</a:t>
+            </a:r>
+          </a:p>
+          <a:p>
+            <a:pPr marL="0" indent="0" algn="l">
+              <a:lnSpc>
+                <a:spcPct val="133000"/>
+              </a:lnSpc>
+              <a:buNone/>
+            </a:pPr>
+            <a:r>
+              <a:rPr lang="en-US" sz="1400" dirty="0">
+                <a:solidFill>
+                  <a:srgbClr val="333F70"/>
+                </a:solidFill>
+                <a:latin typeface="Open Sans" pitchFamily="34" charset="0"/>
+                <a:ea typeface="Open Sans" pitchFamily="34" charset="-122"/>
+                <a:cs typeface="Open Sans" pitchFamily="34" charset="-120"/>
+              </a:rPr>
+              <a:t>811324243024</a:t>
             </a:r>
             <a:endParaRPr lang="en-US" sz="1400" dirty="0"/>
           </a:p>
@@ -2027,6 +2048,967 @@
         </p:txBody>
       </p:sp>
     </p:spTree>
+  </p:cSld>
+  <p:clrMapOvr>
+    <a:masterClrMapping/>
+  </p:clrMapOvr>
+</p:sld>
+</file>
+
+<file path=ppt/slides/slide10.xml><?xml version="1.0" encoding="utf-8"?>
+<p:sld xmlns:a="http://schemas.openxmlformats.org/drawingml/2006/main" xmlns:r="http://schemas.openxmlformats.org/officeDocument/2006/relationships" xmlns:p="http://schemas.openxmlformats.org/presentationml/2006/main">
+  <p:cSld name="Slide 10">
+    <p:spTree>
+      <p:nvGrpSpPr>
+        <p:cNvPr id="1" name=""/>
+        <p:cNvGrpSpPr/>
+        <p:nvPr/>
+      </p:nvGrpSpPr>
+      <p:grpSpPr>
+        <a:xfrm>
+          <a:off x="0" y="0"/>
+          <a:ext cx="0" cy="0"/>
+          <a:chOff x="0" y="0"/>
+          <a:chExt cx="0" cy="0"/>
+        </a:xfrm>
+      </p:grpSpPr>
+      <p:sp>
+        <p:nvSpPr>
+          <p:cNvPr id="2" name="Shape 0"/>
+          <p:cNvSpPr/>
+          <p:nvPr/>
+        </p:nvSpPr>
+        <p:spPr>
+          <a:xfrm>
+            <a:off x="496119" y="428699"/>
+            <a:ext cx="768102" cy="244376"/>
+          </a:xfrm>
+          <a:prstGeom prst="roundRect">
+            <a:avLst>
+              <a:gd name="adj" fmla="val 18274"/>
+            </a:avLst>
+          </a:prstGeom>
+          <a:noFill/>
+          <a:ln/>
+          <a:effectLst>
+            <a:outerShdw blurRad="101600" dist="50800" dir="16200000" algn="bl" rotWithShape="0">
+              <a:srgbClr val="26A688">
+                <a:alpha val="100000"/>
+              </a:srgbClr>
+            </a:outerShdw>
+          </a:effectLst>
+        </p:spPr>
+      </p:sp>
+      <p:sp>
+        <p:nvSpPr>
+          <p:cNvPr id="5" name="Text 3"/>
+          <p:cNvSpPr/>
+          <p:nvPr/>
+        </p:nvSpPr>
+        <p:spPr>
+          <a:xfrm>
+            <a:off x="3386734" y="550887"/>
+            <a:ext cx="2060478" cy="332259"/>
+          </a:xfrm>
+          <a:prstGeom prst="rect">
+            <a:avLst/>
+          </a:prstGeom>
+          <a:noFill/>
+          <a:ln/>
+        </p:spPr>
+        <p:txBody>
+          <a:bodyPr wrap="none" lIns="0" tIns="0" rIns="0" bIns="0" rtlCol="0" anchor="t"/>
+          <a:lstStyle/>
+          <a:p>
+            <a:pPr marL="0" indent="0" algn="ctr">
+              <a:lnSpc>
+                <a:spcPct val="104000"/>
+              </a:lnSpc>
+              <a:buNone/>
+            </a:pPr>
+            <a:r>
+              <a:rPr lang="en-US" sz="2000" b="1" dirty="0">
+                <a:solidFill>
+                  <a:srgbClr val="333F70"/>
+                </a:solidFill>
+                <a:latin typeface="Unbounded Bold" pitchFamily="34" charset="0"/>
+                <a:ea typeface="Unbounded Bold" pitchFamily="34" charset="-122"/>
+                <a:cs typeface="Unbounded Bold" pitchFamily="34" charset="-120"/>
+              </a:rPr>
+              <a:t>Advantages</a:t>
+            </a:r>
+            <a:endParaRPr lang="en-US" sz="2000" dirty="0"/>
+          </a:p>
+        </p:txBody>
+      </p:sp>
+      <p:sp>
+        <p:nvSpPr>
+          <p:cNvPr id="6" name="Shape 4"/>
+          <p:cNvSpPr/>
+          <p:nvPr/>
+        </p:nvSpPr>
+        <p:spPr>
+          <a:xfrm>
+            <a:off x="589902" y="1241971"/>
+            <a:ext cx="3935462" cy="1704752"/>
+          </a:xfrm>
+          <a:prstGeom prst="roundRect">
+            <a:avLst>
+              <a:gd name="adj" fmla="val 5613"/>
+            </a:avLst>
+          </a:prstGeom>
+          <a:solidFill>
+            <a:srgbClr val="DDF8F2"/>
+          </a:solidFill>
+          <a:ln/>
+        </p:spPr>
+      </p:sp>
+      <p:sp>
+        <p:nvSpPr>
+          <p:cNvPr id="7" name="Text 5"/>
+          <p:cNvSpPr/>
+          <p:nvPr/>
+        </p:nvSpPr>
+        <p:spPr>
+          <a:xfrm>
+            <a:off x="722806" y="1366540"/>
+            <a:ext cx="2165300" cy="207690"/>
+          </a:xfrm>
+          <a:prstGeom prst="rect">
+            <a:avLst/>
+          </a:prstGeom>
+          <a:noFill/>
+          <a:ln/>
+        </p:spPr>
+        <p:txBody>
+          <a:bodyPr wrap="none" lIns="0" tIns="0" rIns="0" bIns="0" rtlCol="0" anchor="t"/>
+          <a:lstStyle/>
+          <a:p>
+            <a:pPr marL="0" indent="0" algn="l">
+              <a:lnSpc>
+                <a:spcPct val="104000"/>
+              </a:lnSpc>
+              <a:buNone/>
+            </a:pPr>
+            <a:r>
+              <a:rPr lang="en-US" sz="1300" b="1" dirty="0">
+                <a:solidFill>
+                  <a:srgbClr val="333F70"/>
+                </a:solidFill>
+                <a:latin typeface="Unbounded Bold" pitchFamily="34" charset="0"/>
+                <a:ea typeface="Unbounded Bold" pitchFamily="34" charset="-122"/>
+                <a:cs typeface="Unbounded Bold" pitchFamily="34" charset="-120"/>
+              </a:rPr>
+              <a:t>Key Advantages</a:t>
+            </a:r>
+            <a:endParaRPr lang="en-US" sz="1300" dirty="0"/>
+          </a:p>
+        </p:txBody>
+      </p:sp>
+      <p:sp>
+        <p:nvSpPr>
+          <p:cNvPr id="8" name="Text 6"/>
+          <p:cNvSpPr/>
+          <p:nvPr/>
+        </p:nvSpPr>
+        <p:spPr>
+          <a:xfrm>
+            <a:off x="722806" y="1698799"/>
+            <a:ext cx="3669655" cy="1204317"/>
+          </a:xfrm>
+          <a:prstGeom prst="rect">
+            <a:avLst/>
+          </a:prstGeom>
+          <a:noFill/>
+          <a:ln/>
+        </p:spPr>
+        <p:txBody>
+          <a:bodyPr wrap="square" lIns="0" tIns="0" rIns="0" bIns="0" rtlCol="0" anchor="t">
+            <a:normAutofit/>
+          </a:bodyPr>
+          <a:lstStyle/>
+          <a:p>
+            <a:pPr marL="203200" indent="-203200" algn="l">
+              <a:lnSpc>
+                <a:spcPct val="129000"/>
+              </a:lnSpc>
+              <a:buSzPct val="100000"/>
+              <a:buChar char="•"/>
+            </a:pPr>
+            <a:r>
+              <a:rPr lang="en-US" sz="1100" dirty="0">
+                <a:solidFill>
+                  <a:srgbClr val="333F70"/>
+                </a:solidFill>
+                <a:latin typeface="Open Sans" pitchFamily="34" charset="0"/>
+                <a:ea typeface="Open Sans" pitchFamily="34" charset="-122"/>
+                <a:cs typeface="Open Sans" pitchFamily="34" charset="-120"/>
+              </a:rPr>
+              <a:t>Simple console-based interface.</a:t>
+            </a:r>
+            <a:endParaRPr lang="en-US" sz="1100" dirty="0"/>
+          </a:p>
+          <a:p>
+            <a:pPr marL="203200" indent="-203200" algn="l">
+              <a:lnSpc>
+                <a:spcPct val="129000"/>
+              </a:lnSpc>
+              <a:buSzPct val="100000"/>
+              <a:buChar char="•"/>
+            </a:pPr>
+            <a:r>
+              <a:rPr lang="en-US" sz="1100" dirty="0">
+                <a:solidFill>
+                  <a:srgbClr val="333F70"/>
+                </a:solidFill>
+                <a:latin typeface="Open Sans" pitchFamily="34" charset="0"/>
+                <a:ea typeface="Open Sans" pitchFamily="34" charset="-122"/>
+                <a:cs typeface="Open Sans" pitchFamily="34" charset="-120"/>
+              </a:rPr>
+              <a:t>Fast dictionary-powered search by Employee ID.</a:t>
+            </a:r>
+            <a:endParaRPr lang="en-US" sz="1100" dirty="0"/>
+          </a:p>
+          <a:p>
+            <a:pPr marL="203200" indent="-203200" algn="l">
+              <a:lnSpc>
+                <a:spcPct val="129000"/>
+              </a:lnSpc>
+              <a:buSzPct val="100000"/>
+              <a:buChar char="•"/>
+            </a:pPr>
+            <a:r>
+              <a:rPr lang="en-US" sz="1100" dirty="0">
+                <a:solidFill>
+                  <a:srgbClr val="333F70"/>
+                </a:solidFill>
+                <a:latin typeface="Open Sans" pitchFamily="34" charset="0"/>
+                <a:ea typeface="Open Sans" pitchFamily="34" charset="-122"/>
+                <a:cs typeface="Open Sans" pitchFamily="34" charset="-120"/>
+              </a:rPr>
+              <a:t>Modular file structure for easy maintenance.</a:t>
+            </a:r>
+            <a:endParaRPr lang="en-US" sz="1100" dirty="0"/>
+          </a:p>
+          <a:p>
+            <a:pPr marL="203200" indent="-203200" algn="l">
+              <a:lnSpc>
+                <a:spcPct val="129000"/>
+              </a:lnSpc>
+              <a:buSzPct val="100000"/>
+              <a:buChar char="•"/>
+            </a:pPr>
+            <a:r>
+              <a:rPr lang="en-US" sz="1100" dirty="0">
+                <a:solidFill>
+                  <a:srgbClr val="333F70"/>
+                </a:solidFill>
+                <a:latin typeface="Open Sans" pitchFamily="34" charset="0"/>
+                <a:ea typeface="Open Sans" pitchFamily="34" charset="-122"/>
+                <a:cs typeface="Open Sans" pitchFamily="34" charset="-120"/>
+              </a:rPr>
+              <a:t>Demonstrates all major OOP principles.</a:t>
+            </a:r>
+            <a:endParaRPr lang="en-US" sz="1100" dirty="0"/>
+          </a:p>
+          <a:p>
+            <a:pPr marL="203200" indent="-203200" algn="l">
+              <a:lnSpc>
+                <a:spcPct val="129000"/>
+              </a:lnSpc>
+              <a:buSzPct val="100000"/>
+              <a:buChar char="•"/>
+            </a:pPr>
+            <a:r>
+              <a:rPr lang="en-US" sz="1100" dirty="0">
+                <a:solidFill>
+                  <a:srgbClr val="333F70"/>
+                </a:solidFill>
+                <a:latin typeface="Open Sans" pitchFamily="34" charset="0"/>
+                <a:ea typeface="Open Sans" pitchFamily="34" charset="-122"/>
+                <a:cs typeface="Open Sans" pitchFamily="34" charset="-120"/>
+              </a:rPr>
+              <a:t>Reusable and extensible codebase.</a:t>
+            </a:r>
+            <a:endParaRPr lang="en-US" sz="1100" dirty="0"/>
+          </a:p>
+        </p:txBody>
+      </p:sp>
+      <p:sp>
+        <p:nvSpPr>
+          <p:cNvPr id="9" name="Text 7"/>
+          <p:cNvSpPr/>
+          <p:nvPr/>
+        </p:nvSpPr>
+        <p:spPr>
+          <a:xfrm>
+            <a:off x="4961131" y="1366540"/>
+            <a:ext cx="2581405" cy="207690"/>
+          </a:xfrm>
+          <a:prstGeom prst="rect">
+            <a:avLst/>
+          </a:prstGeom>
+          <a:noFill/>
+          <a:ln/>
+        </p:spPr>
+        <p:txBody>
+          <a:bodyPr wrap="none" lIns="0" tIns="0" rIns="0" bIns="0" rtlCol="0" anchor="t"/>
+          <a:lstStyle/>
+          <a:p>
+            <a:pPr marL="0" indent="0" algn="l">
+              <a:lnSpc>
+                <a:spcPct val="104000"/>
+              </a:lnSpc>
+              <a:buNone/>
+            </a:pPr>
+            <a:r>
+              <a:rPr lang="en-US" sz="1300" b="1" dirty="0">
+                <a:solidFill>
+                  <a:srgbClr val="333F70"/>
+                </a:solidFill>
+                <a:latin typeface="Unbounded Bold" pitchFamily="34" charset="0"/>
+                <a:ea typeface="Unbounded Bold" pitchFamily="34" charset="-122"/>
+                <a:cs typeface="Unbounded Bold" pitchFamily="34" charset="-120"/>
+              </a:rPr>
+              <a:t>Future Enhancements</a:t>
+            </a:r>
+            <a:endParaRPr lang="en-US" sz="1300" dirty="0"/>
+          </a:p>
+        </p:txBody>
+      </p:sp>
+      <p:sp>
+        <p:nvSpPr>
+          <p:cNvPr id="10" name="Text 8"/>
+          <p:cNvSpPr/>
+          <p:nvPr/>
+        </p:nvSpPr>
+        <p:spPr>
+          <a:xfrm>
+            <a:off x="4961131" y="1698799"/>
+            <a:ext cx="3795435" cy="1204317"/>
+          </a:xfrm>
+          <a:prstGeom prst="rect">
+            <a:avLst/>
+          </a:prstGeom>
+          <a:noFill/>
+          <a:ln/>
+        </p:spPr>
+        <p:txBody>
+          <a:bodyPr wrap="square" lIns="0" tIns="0" rIns="0" bIns="0" rtlCol="0" anchor="t">
+            <a:normAutofit/>
+          </a:bodyPr>
+          <a:lstStyle/>
+          <a:p>
+            <a:pPr marL="203200" indent="-203200" algn="l">
+              <a:lnSpc>
+                <a:spcPct val="129000"/>
+              </a:lnSpc>
+              <a:buSzPct val="100000"/>
+              <a:buChar char="•"/>
+            </a:pPr>
+            <a:r>
+              <a:rPr lang="en-US" sz="1100" dirty="0">
+                <a:solidFill>
+                  <a:srgbClr val="333F70"/>
+                </a:solidFill>
+                <a:latin typeface="Open Sans" pitchFamily="34" charset="0"/>
+                <a:ea typeface="Open Sans" pitchFamily="34" charset="-122"/>
+                <a:cs typeface="Open Sans" pitchFamily="34" charset="-120"/>
+              </a:rPr>
+              <a:t>Login authentication for secure access.</a:t>
+            </a:r>
+            <a:endParaRPr lang="en-US" sz="1100" dirty="0"/>
+          </a:p>
+          <a:p>
+            <a:pPr marL="203200" indent="-203200" algn="l">
+              <a:lnSpc>
+                <a:spcPct val="129000"/>
+              </a:lnSpc>
+              <a:buSzPct val="100000"/>
+              <a:buChar char="•"/>
+            </a:pPr>
+            <a:r>
+              <a:rPr lang="en-US" sz="1100" dirty="0">
+                <a:solidFill>
+                  <a:srgbClr val="333F70"/>
+                </a:solidFill>
+                <a:latin typeface="Open Sans" pitchFamily="34" charset="0"/>
+                <a:ea typeface="Open Sans" pitchFamily="34" charset="-122"/>
+                <a:cs typeface="Open Sans" pitchFamily="34" charset="-120"/>
+              </a:rPr>
+              <a:t>MySQL database integration for scalability.</a:t>
+            </a:r>
+            <a:endParaRPr lang="en-US" sz="1100" dirty="0"/>
+          </a:p>
+          <a:p>
+            <a:pPr marL="203200" indent="-203200" algn="l">
+              <a:lnSpc>
+                <a:spcPct val="129000"/>
+              </a:lnSpc>
+              <a:buSzPct val="100000"/>
+              <a:buChar char="•"/>
+            </a:pPr>
+            <a:r>
+              <a:rPr lang="en-US" sz="1100" dirty="0">
+                <a:solidFill>
+                  <a:srgbClr val="333F70"/>
+                </a:solidFill>
+                <a:latin typeface="Open Sans" pitchFamily="34" charset="0"/>
+                <a:ea typeface="Open Sans" pitchFamily="34" charset="-122"/>
+                <a:cs typeface="Open Sans" pitchFamily="34" charset="-120"/>
+              </a:rPr>
+              <a:t>Employee attendance and leave management.</a:t>
+            </a:r>
+            <a:endParaRPr lang="en-US" sz="1100" dirty="0"/>
+          </a:p>
+          <a:p>
+            <a:pPr marL="203200" indent="-203200" algn="l">
+              <a:lnSpc>
+                <a:spcPct val="129000"/>
+              </a:lnSpc>
+              <a:buSzPct val="100000"/>
+              <a:buChar char="•"/>
+            </a:pPr>
+            <a:r>
+              <a:rPr lang="en-US" sz="1100" dirty="0">
+                <a:solidFill>
+                  <a:srgbClr val="333F70"/>
+                </a:solidFill>
+                <a:latin typeface="Open Sans" pitchFamily="34" charset="0"/>
+                <a:ea typeface="Open Sans" pitchFamily="34" charset="-122"/>
+                <a:cs typeface="Open Sans" pitchFamily="34" charset="-120"/>
+              </a:rPr>
+              <a:t>Salary slip generation and data dashboards.</a:t>
+            </a:r>
+            <a:endParaRPr lang="en-US" sz="1100" dirty="0"/>
+          </a:p>
+        </p:txBody>
+      </p:sp>
+      <p:sp>
+        <p:nvSpPr>
+          <p:cNvPr id="11" name="Shape 9"/>
+          <p:cNvSpPr/>
+          <p:nvPr/>
+        </p:nvSpPr>
+        <p:spPr>
+          <a:xfrm>
+            <a:off x="488677" y="3184987"/>
+            <a:ext cx="8151763" cy="14288"/>
+          </a:xfrm>
+          <a:prstGeom prst="roundRect">
+            <a:avLst>
+              <a:gd name="adj" fmla="val 59998"/>
+            </a:avLst>
+          </a:prstGeom>
+          <a:solidFill>
+            <a:srgbClr val="333F70">
+              <a:alpha val="50000"/>
+            </a:srgbClr>
+          </a:solidFill>
+          <a:ln/>
+        </p:spPr>
+      </p:sp>
+      <p:sp>
+        <p:nvSpPr>
+          <p:cNvPr id="12" name="Shape 10"/>
+          <p:cNvSpPr/>
+          <p:nvPr/>
+        </p:nvSpPr>
+        <p:spPr>
+          <a:xfrm>
+            <a:off x="496119" y="3422464"/>
+            <a:ext cx="8151763" cy="1070061"/>
+          </a:xfrm>
+          <a:prstGeom prst="roundRect">
+            <a:avLst>
+              <a:gd name="adj" fmla="val 7807"/>
+            </a:avLst>
+          </a:prstGeom>
+          <a:solidFill>
+            <a:srgbClr val="D6F5EE"/>
+          </a:solidFill>
+          <a:ln/>
+        </p:spPr>
+      </p:sp>
+      <p:pic>
+        <p:nvPicPr>
+          <p:cNvPr id="13" name="Image 0" descr="preencoded.png"/>
+          <p:cNvPicPr>
+            <a:picLocks noChangeAspect="1"/>
+          </p:cNvPicPr>
+          <p:nvPr/>
+        </p:nvPicPr>
+        <p:blipFill>
+          <a:blip r:embed="rId3"/>
+          <a:stretch>
+            <a:fillRect/>
+          </a:stretch>
+        </p:blipFill>
+        <p:spPr>
+          <a:xfrm>
+            <a:off x="629022" y="3495526"/>
+            <a:ext cx="166092" cy="132904"/>
+          </a:xfrm>
+          <a:prstGeom prst="rect">
+            <a:avLst/>
+          </a:prstGeom>
+        </p:spPr>
+      </p:pic>
+      <p:sp>
+        <p:nvSpPr>
+          <p:cNvPr id="14" name="Text 11"/>
+          <p:cNvSpPr/>
+          <p:nvPr/>
+        </p:nvSpPr>
+        <p:spPr>
+          <a:xfrm>
+            <a:off x="928018" y="3711479"/>
+            <a:ext cx="7586960" cy="590403"/>
+          </a:xfrm>
+          <a:prstGeom prst="rect">
+            <a:avLst/>
+          </a:prstGeom>
+          <a:noFill/>
+          <a:ln/>
+        </p:spPr>
+        <p:txBody>
+          <a:bodyPr wrap="square" lIns="0" tIns="0" rIns="0" bIns="0" rtlCol="0" anchor="t">
+            <a:normAutofit/>
+          </a:bodyPr>
+          <a:lstStyle/>
+          <a:p>
+            <a:pPr marL="0" indent="0" algn="l">
+              <a:lnSpc>
+                <a:spcPct val="129000"/>
+              </a:lnSpc>
+              <a:buNone/>
+            </a:pPr>
+            <a:r>
+              <a:rPr lang="en-US" sz="1050" dirty="0">
+                <a:solidFill>
+                  <a:srgbClr val="000000"/>
+                </a:solidFill>
+                <a:latin typeface="Open Sans" pitchFamily="34" charset="0"/>
+                <a:ea typeface="Open Sans" pitchFamily="34" charset="-122"/>
+                <a:cs typeface="Open Sans" pitchFamily="34" charset="-120"/>
+              </a:rPr>
+              <a:t>The project successfully demonstrates CRUD operations, inheritance, polymorphism, and file handling — forming a strong foundation for a full-scale HR management system.</a:t>
+            </a:r>
+            <a:endParaRPr lang="en-US" sz="1050" dirty="0"/>
+          </a:p>
+        </p:txBody>
+      </p:sp>
+      <p:sp>
+        <p:nvSpPr>
+          <p:cNvPr id="15" name="Text 12"/>
+          <p:cNvSpPr/>
+          <p:nvPr/>
+        </p:nvSpPr>
+        <p:spPr>
+          <a:xfrm>
+            <a:off x="496119" y="4162723"/>
+            <a:ext cx="8151763" cy="552078"/>
+          </a:xfrm>
+          <a:prstGeom prst="rect">
+            <a:avLst/>
+          </a:prstGeom>
+          <a:noFill/>
+          <a:ln/>
+        </p:spPr>
+        <p:txBody>
+          <a:bodyPr wrap="square" lIns="0" tIns="0" rIns="0" bIns="0" rtlCol="0" anchor="t"/>
+          <a:lstStyle/>
+          <a:p>
+            <a:pPr marL="0" indent="0" algn="ctr">
+              <a:lnSpc>
+                <a:spcPct val="129000"/>
+              </a:lnSpc>
+              <a:spcAft>
+                <a:spcPts val="2700"/>
+              </a:spcAft>
+              <a:buNone/>
+            </a:pPr>
+            <a:endParaRPr lang="en-US" sz="1000" dirty="0"/>
+          </a:p>
+          <a:p>
+            <a:pPr marL="0" indent="0" algn="ctr">
+              <a:lnSpc>
+                <a:spcPct val="129000"/>
+              </a:lnSpc>
+              <a:buNone/>
+            </a:pPr>
+            <a:endParaRPr lang="en-US" sz="1000" dirty="0"/>
+          </a:p>
+        </p:txBody>
+      </p:sp>
+      <p:sp>
+        <p:nvSpPr>
+          <p:cNvPr id="17" name="Rectangle: Rounded Corners 16">
+            <a:extLst>
+              <a:ext uri="{FF2B5EF4-FFF2-40B4-BE49-F238E27FC236}">
+                <a16:creationId xmlns:a16="http://schemas.microsoft.com/office/drawing/2014/main" id="{C6510335-9FE5-08E2-AC44-5975592B73E2}"/>
+              </a:ext>
+            </a:extLst>
+          </p:cNvPr>
+          <p:cNvSpPr>
+            <a:spLocks noGrp="1" noRot="1" noMove="1" noResize="1" noEditPoints="1" noAdjustHandles="1" noChangeArrowheads="1" noChangeShapeType="1"/>
+          </p:cNvSpPr>
+          <p:nvPr/>
+        </p:nvSpPr>
+        <p:spPr>
+          <a:xfrm>
+            <a:off x="8022077" y="4833257"/>
+            <a:ext cx="1070042" cy="254725"/>
+          </a:xfrm>
+          <a:prstGeom prst="roundRect">
+            <a:avLst/>
+          </a:prstGeom>
+          <a:ln>
+            <a:solidFill>
+              <a:schemeClr val="bg1"/>
+            </a:solidFill>
+          </a:ln>
+        </p:spPr>
+        <p:style>
+          <a:lnRef idx="2">
+            <a:schemeClr val="accent1">
+              <a:shade val="15000"/>
+            </a:schemeClr>
+          </a:lnRef>
+          <a:fillRef idx="1001">
+            <a:schemeClr val="lt1"/>
+          </a:fillRef>
+          <a:effectRef idx="0">
+            <a:schemeClr val="accent1"/>
+          </a:effectRef>
+          <a:fontRef idx="minor">
+            <a:schemeClr val="lt1"/>
+          </a:fontRef>
+        </p:style>
+        <p:txBody>
+          <a:bodyPr rtlCol="0" anchor="ctr"/>
+          <a:lstStyle/>
+          <a:p>
+            <a:pPr algn="ctr"/>
+            <a:endParaRPr lang="en-IN"/>
+          </a:p>
+        </p:txBody>
+      </p:sp>
+    </p:spTree>
+  </p:cSld>
+  <p:clrMapOvr>
+    <a:masterClrMapping/>
+  </p:clrMapOvr>
+</p:sld>
+</file>
+
+<file path=ppt/slides/slide11.xml><?xml version="1.0" encoding="utf-8"?>
+<p:sld xmlns:a="http://schemas.openxmlformats.org/drawingml/2006/main" xmlns:r="http://schemas.openxmlformats.org/officeDocument/2006/relationships" xmlns:p="http://schemas.openxmlformats.org/presentationml/2006/main">
+  <p:cSld>
+    <p:spTree>
+      <p:nvGrpSpPr>
+        <p:cNvPr id="1" name=""/>
+        <p:cNvGrpSpPr/>
+        <p:nvPr/>
+      </p:nvGrpSpPr>
+      <p:grpSpPr>
+        <a:xfrm>
+          <a:off x="0" y="0"/>
+          <a:ext cx="0" cy="0"/>
+          <a:chOff x="0" y="0"/>
+          <a:chExt cx="0" cy="0"/>
+        </a:xfrm>
+      </p:grpSpPr>
+      <p:sp>
+        <p:nvSpPr>
+          <p:cNvPr id="3" name="TextBox 2">
+            <a:extLst>
+              <a:ext uri="{FF2B5EF4-FFF2-40B4-BE49-F238E27FC236}">
+                <a16:creationId xmlns:a16="http://schemas.microsoft.com/office/drawing/2014/main" id="{0F333071-967C-70FA-5A02-1DBB3D06FAFB}"/>
+              </a:ext>
+            </a:extLst>
+          </p:cNvPr>
+          <p:cNvSpPr txBox="1"/>
+          <p:nvPr/>
+        </p:nvSpPr>
+        <p:spPr>
+          <a:xfrm>
+            <a:off x="999309" y="904493"/>
+            <a:ext cx="6799217" cy="3477875"/>
+          </a:xfrm>
+          <a:prstGeom prst="rect">
+            <a:avLst/>
+          </a:prstGeom>
+          <a:noFill/>
+        </p:spPr>
+        <p:txBody>
+          <a:bodyPr wrap="square">
+            <a:spAutoFit/>
+          </a:bodyPr>
+          <a:lstStyle/>
+          <a:p>
+            <a:pPr algn="ctr">
+              <a:buNone/>
+            </a:pPr>
+            <a:r>
+              <a:rPr lang="en-IN" sz="2000" b="1" dirty="0">
+                <a:solidFill>
+                  <a:schemeClr val="accent1">
+                    <a:lumMod val="50000"/>
+                  </a:schemeClr>
+                </a:solidFill>
+              </a:rPr>
+              <a:t>Conclusion</a:t>
+            </a:r>
+          </a:p>
+          <a:p>
+            <a:pPr algn="ctr">
+              <a:buNone/>
+            </a:pPr>
+            <a:endParaRPr lang="en-IN" sz="2000" b="1" dirty="0">
+              <a:solidFill>
+                <a:schemeClr val="accent1">
+                  <a:lumMod val="50000"/>
+                </a:schemeClr>
+              </a:solidFill>
+            </a:endParaRPr>
+          </a:p>
+          <a:p>
+            <a:pPr>
+              <a:buFont typeface="Arial" panose="020B0604020202020204" pitchFamily="34" charset="0"/>
+              <a:buChar char="•"/>
+            </a:pPr>
+            <a:r>
+              <a:rPr lang="en-IN" sz="1200" dirty="0">
+                <a:solidFill>
+                  <a:schemeClr val="accent1">
+                    <a:lumMod val="75000"/>
+                  </a:schemeClr>
+                </a:solidFill>
+                <a:latin typeface="Open Sans" panose="020B0606030504020204" pitchFamily="34" charset="0"/>
+                <a:ea typeface="Open Sans" panose="020B0606030504020204" pitchFamily="34" charset="0"/>
+                <a:cs typeface="Open Sans" panose="020B0606030504020204" pitchFamily="34" charset="0"/>
+              </a:rPr>
+              <a:t>Developed a console-based Employee Record Management System using Python.</a:t>
+            </a:r>
+          </a:p>
+          <a:p>
+            <a:pPr>
+              <a:buFont typeface="Arial" panose="020B0604020202020204" pitchFamily="34" charset="0"/>
+              <a:buChar char="•"/>
+            </a:pPr>
+            <a:endParaRPr lang="en-IN" sz="1200" dirty="0">
+              <a:solidFill>
+                <a:schemeClr val="accent1">
+                  <a:lumMod val="75000"/>
+                </a:schemeClr>
+              </a:solidFill>
+              <a:latin typeface="Open Sans" panose="020B0606030504020204" pitchFamily="34" charset="0"/>
+              <a:ea typeface="Open Sans" panose="020B0606030504020204" pitchFamily="34" charset="0"/>
+              <a:cs typeface="Open Sans" panose="020B0606030504020204" pitchFamily="34" charset="0"/>
+            </a:endParaRPr>
+          </a:p>
+          <a:p>
+            <a:pPr>
+              <a:buFont typeface="Arial" panose="020B0604020202020204" pitchFamily="34" charset="0"/>
+              <a:buChar char="•"/>
+            </a:pPr>
+            <a:r>
+              <a:rPr lang="en-IN" sz="1200" dirty="0">
+                <a:solidFill>
+                  <a:schemeClr val="accent1">
+                    <a:lumMod val="75000"/>
+                  </a:schemeClr>
+                </a:solidFill>
+                <a:latin typeface="Open Sans" panose="020B0606030504020204" pitchFamily="34" charset="0"/>
+                <a:ea typeface="Open Sans" panose="020B0606030504020204" pitchFamily="34" charset="0"/>
+                <a:cs typeface="Open Sans" panose="020B0606030504020204" pitchFamily="34" charset="0"/>
+              </a:rPr>
+              <a:t>Successfully implemented CRUD operations for employee records.</a:t>
+            </a:r>
+          </a:p>
+          <a:p>
+            <a:endParaRPr lang="en-IN" sz="1200" dirty="0">
+              <a:solidFill>
+                <a:schemeClr val="accent1">
+                  <a:lumMod val="75000"/>
+                </a:schemeClr>
+              </a:solidFill>
+              <a:latin typeface="Open Sans" panose="020B0606030504020204" pitchFamily="34" charset="0"/>
+              <a:ea typeface="Open Sans" panose="020B0606030504020204" pitchFamily="34" charset="0"/>
+              <a:cs typeface="Open Sans" panose="020B0606030504020204" pitchFamily="34" charset="0"/>
+            </a:endParaRPr>
+          </a:p>
+          <a:p>
+            <a:pPr>
+              <a:buFont typeface="Arial" panose="020B0604020202020204" pitchFamily="34" charset="0"/>
+              <a:buChar char="•"/>
+            </a:pPr>
+            <a:r>
+              <a:rPr lang="en-IN" sz="1200" dirty="0">
+                <a:solidFill>
+                  <a:schemeClr val="accent1">
+                    <a:lumMod val="75000"/>
+                  </a:schemeClr>
+                </a:solidFill>
+                <a:latin typeface="Open Sans" panose="020B0606030504020204" pitchFamily="34" charset="0"/>
+                <a:ea typeface="Open Sans" panose="020B0606030504020204" pitchFamily="34" charset="0"/>
+                <a:cs typeface="Open Sans" panose="020B0606030504020204" pitchFamily="34" charset="0"/>
+              </a:rPr>
+              <a:t>Applied OOP concepts: Encapsulation, Inheritance, Abstraction, and Polymorphism.</a:t>
+            </a:r>
+          </a:p>
+          <a:p>
+            <a:pPr>
+              <a:buFont typeface="Arial" panose="020B0604020202020204" pitchFamily="34" charset="0"/>
+              <a:buChar char="•"/>
+            </a:pPr>
+            <a:endParaRPr lang="en-IN" sz="1200" dirty="0">
+              <a:solidFill>
+                <a:schemeClr val="accent1">
+                  <a:lumMod val="75000"/>
+                </a:schemeClr>
+              </a:solidFill>
+              <a:latin typeface="Open Sans" panose="020B0606030504020204" pitchFamily="34" charset="0"/>
+              <a:ea typeface="Open Sans" panose="020B0606030504020204" pitchFamily="34" charset="0"/>
+              <a:cs typeface="Open Sans" panose="020B0606030504020204" pitchFamily="34" charset="0"/>
+            </a:endParaRPr>
+          </a:p>
+          <a:p>
+            <a:pPr>
+              <a:buFont typeface="Arial" panose="020B0604020202020204" pitchFamily="34" charset="0"/>
+              <a:buChar char="•"/>
+            </a:pPr>
+            <a:r>
+              <a:rPr lang="en-IN" sz="1200" dirty="0">
+                <a:solidFill>
+                  <a:schemeClr val="accent1">
+                    <a:lumMod val="75000"/>
+                  </a:schemeClr>
+                </a:solidFill>
+                <a:latin typeface="Open Sans" panose="020B0606030504020204" pitchFamily="34" charset="0"/>
+                <a:ea typeface="Open Sans" panose="020B0606030504020204" pitchFamily="34" charset="0"/>
+                <a:cs typeface="Open Sans" panose="020B0606030504020204" pitchFamily="34" charset="0"/>
+              </a:rPr>
+              <a:t>Used dictionaries for efficient data management.</a:t>
+            </a:r>
+          </a:p>
+          <a:p>
+            <a:pPr>
+              <a:buFont typeface="Arial" panose="020B0604020202020204" pitchFamily="34" charset="0"/>
+              <a:buChar char="•"/>
+            </a:pPr>
+            <a:endParaRPr lang="en-IN" sz="1200" dirty="0">
+              <a:solidFill>
+                <a:schemeClr val="accent1">
+                  <a:lumMod val="75000"/>
+                </a:schemeClr>
+              </a:solidFill>
+              <a:latin typeface="Open Sans" panose="020B0606030504020204" pitchFamily="34" charset="0"/>
+              <a:ea typeface="Open Sans" panose="020B0606030504020204" pitchFamily="34" charset="0"/>
+              <a:cs typeface="Open Sans" panose="020B0606030504020204" pitchFamily="34" charset="0"/>
+            </a:endParaRPr>
+          </a:p>
+          <a:p>
+            <a:pPr>
+              <a:buFont typeface="Arial" panose="020B0604020202020204" pitchFamily="34" charset="0"/>
+              <a:buChar char="•"/>
+            </a:pPr>
+            <a:r>
+              <a:rPr lang="en-IN" sz="1200" dirty="0">
+                <a:solidFill>
+                  <a:schemeClr val="accent1">
+                    <a:lumMod val="75000"/>
+                  </a:schemeClr>
+                </a:solidFill>
+                <a:latin typeface="Open Sans" panose="020B0606030504020204" pitchFamily="34" charset="0"/>
+                <a:ea typeface="Open Sans" panose="020B0606030504020204" pitchFamily="34" charset="0"/>
+                <a:cs typeface="Open Sans" panose="020B0606030504020204" pitchFamily="34" charset="0"/>
+              </a:rPr>
+              <a:t>Implemented file handling for persistent data storage.</a:t>
+            </a:r>
+          </a:p>
+          <a:p>
+            <a:pPr>
+              <a:buFont typeface="Arial" panose="020B0604020202020204" pitchFamily="34" charset="0"/>
+              <a:buChar char="•"/>
+            </a:pPr>
+            <a:endParaRPr lang="en-IN" sz="1200" dirty="0">
+              <a:solidFill>
+                <a:schemeClr val="accent1">
+                  <a:lumMod val="75000"/>
+                </a:schemeClr>
+              </a:solidFill>
+              <a:latin typeface="Open Sans" panose="020B0606030504020204" pitchFamily="34" charset="0"/>
+              <a:ea typeface="Open Sans" panose="020B0606030504020204" pitchFamily="34" charset="0"/>
+              <a:cs typeface="Open Sans" panose="020B0606030504020204" pitchFamily="34" charset="0"/>
+            </a:endParaRPr>
+          </a:p>
+          <a:p>
+            <a:pPr>
+              <a:buFont typeface="Arial" panose="020B0604020202020204" pitchFamily="34" charset="0"/>
+              <a:buChar char="•"/>
+            </a:pPr>
+            <a:r>
+              <a:rPr lang="en-IN" sz="1200" dirty="0">
+                <a:solidFill>
+                  <a:schemeClr val="accent1">
+                    <a:lumMod val="75000"/>
+                  </a:schemeClr>
+                </a:solidFill>
+                <a:latin typeface="Open Sans" panose="020B0606030504020204" pitchFamily="34" charset="0"/>
+                <a:ea typeface="Open Sans" panose="020B0606030504020204" pitchFamily="34" charset="0"/>
+                <a:cs typeface="Open Sans" panose="020B0606030504020204" pitchFamily="34" charset="0"/>
+              </a:rPr>
+              <a:t>Designed a modular and easy-to-maintain project structure.</a:t>
+            </a:r>
+          </a:p>
+          <a:p>
+            <a:endParaRPr lang="en-IN" sz="1200" dirty="0">
+              <a:solidFill>
+                <a:schemeClr val="accent1">
+                  <a:lumMod val="75000"/>
+                </a:schemeClr>
+              </a:solidFill>
+              <a:latin typeface="Open Sans" panose="020B0606030504020204" pitchFamily="34" charset="0"/>
+              <a:ea typeface="Open Sans" panose="020B0606030504020204" pitchFamily="34" charset="0"/>
+              <a:cs typeface="Open Sans" panose="020B0606030504020204" pitchFamily="34" charset="0"/>
+            </a:endParaRPr>
+          </a:p>
+          <a:p>
+            <a:pPr>
+              <a:buFont typeface="Arial" panose="020B0604020202020204" pitchFamily="34" charset="0"/>
+              <a:buChar char="•"/>
+            </a:pPr>
+            <a:r>
+              <a:rPr lang="en-IN" sz="1200" dirty="0">
+                <a:solidFill>
+                  <a:schemeClr val="accent1">
+                    <a:lumMod val="75000"/>
+                  </a:schemeClr>
+                </a:solidFill>
+                <a:latin typeface="Open Sans" panose="020B0606030504020204" pitchFamily="34" charset="0"/>
+                <a:ea typeface="Open Sans" panose="020B0606030504020204" pitchFamily="34" charset="0"/>
+                <a:cs typeface="Open Sans" panose="020B0606030504020204" pitchFamily="34" charset="0"/>
+              </a:rPr>
+              <a:t>Provides a foundation for future enhancements such as databases, GUI, and authentication.</a:t>
+            </a:r>
+          </a:p>
+          <a:p>
+            <a:pPr>
+              <a:buFont typeface="Arial" panose="020B0604020202020204" pitchFamily="34" charset="0"/>
+              <a:buChar char="•"/>
+            </a:pPr>
+            <a:endParaRPr lang="en-IN" dirty="0"/>
+          </a:p>
+        </p:txBody>
+      </p:sp>
+    </p:spTree>
+    <p:extLst>
+      <p:ext uri="{BB962C8B-B14F-4D97-AF65-F5344CB8AC3E}">
+        <p14:creationId xmlns:p14="http://schemas.microsoft.com/office/powerpoint/2010/main" val="601693143"/>
+      </p:ext>
+    </p:extLst>
   </p:cSld>
   <p:clrMapOvr>
     <a:masterClrMapping/>
@@ -8172,6 +9154,764 @@
 
 <file path=ppt/slides/slide8.xml><?xml version="1.0" encoding="utf-8"?>
 <p:sld xmlns:a="http://schemas.openxmlformats.org/drawingml/2006/main" xmlns:r="http://schemas.openxmlformats.org/officeDocument/2006/relationships" xmlns:p="http://schemas.openxmlformats.org/presentationml/2006/main">
+  <p:cSld>
+    <p:spTree>
+      <p:nvGrpSpPr>
+        <p:cNvPr id="1" name=""/>
+        <p:cNvGrpSpPr/>
+        <p:nvPr/>
+      </p:nvGrpSpPr>
+      <p:grpSpPr>
+        <a:xfrm>
+          <a:off x="0" y="0"/>
+          <a:ext cx="0" cy="0"/>
+          <a:chOff x="0" y="0"/>
+          <a:chExt cx="0" cy="0"/>
+        </a:xfrm>
+      </p:grpSpPr>
+      <p:graphicFrame>
+        <p:nvGraphicFramePr>
+          <p:cNvPr id="5" name="Table 4">
+            <a:extLst>
+              <a:ext uri="{FF2B5EF4-FFF2-40B4-BE49-F238E27FC236}">
+                <a16:creationId xmlns:a16="http://schemas.microsoft.com/office/drawing/2014/main" id="{CC5DD3A4-2656-FDD5-6C28-83EF3BDAC16D}"/>
+              </a:ext>
+            </a:extLst>
+          </p:cNvPr>
+          <p:cNvGraphicFramePr>
+            <a:graphicFrameLocks noGrp="1"/>
+          </p:cNvGraphicFramePr>
+          <p:nvPr>
+            <p:extLst>
+              <p:ext uri="{D42A27DB-BD31-4B8C-83A1-F6EECF244321}">
+                <p14:modId xmlns:p14="http://schemas.microsoft.com/office/powerpoint/2010/main" val="1332351183"/>
+              </p:ext>
+            </p:extLst>
+          </p:nvPr>
+        </p:nvGraphicFramePr>
+        <p:xfrm>
+          <a:off x="765810" y="877389"/>
+          <a:ext cx="7886700" cy="3291840"/>
+        </p:xfrm>
+        <a:graphic>
+          <a:graphicData uri="http://schemas.openxmlformats.org/drawingml/2006/table">
+            <a:tbl>
+              <a:tblPr/>
+              <a:tblGrid>
+                <a:gridCol w="3943350">
+                  <a:extLst>
+                    <a:ext uri="{9D8B030D-6E8A-4147-A177-3AD203B41FA5}">
+                      <a16:colId xmlns:a16="http://schemas.microsoft.com/office/drawing/2014/main" val="4248305630"/>
+                    </a:ext>
+                  </a:extLst>
+                </a:gridCol>
+                <a:gridCol w="3943350">
+                  <a:extLst>
+                    <a:ext uri="{9D8B030D-6E8A-4147-A177-3AD203B41FA5}">
+                      <a16:colId xmlns:a16="http://schemas.microsoft.com/office/drawing/2014/main" val="37145144"/>
+                    </a:ext>
+                  </a:extLst>
+                </a:gridCol>
+              </a:tblGrid>
+              <a:tr h="421255">
+                <a:tc>
+                  <a:txBody>
+                    <a:bodyPr/>
+                    <a:lstStyle/>
+                    <a:p>
+                      <a:pPr algn="l">
+                        <a:buNone/>
+                      </a:pPr>
+                      <a:r>
+                        <a:rPr lang="en-IN" sz="2000" b="1" dirty="0">
+                          <a:solidFill>
+                            <a:schemeClr val="accent1">
+                              <a:lumMod val="50000"/>
+                            </a:schemeClr>
+                          </a:solidFill>
+                        </a:rPr>
+                        <a:t>Tool / Technology</a:t>
+                      </a:r>
+                    </a:p>
+                    <a:p>
+                      <a:pPr algn="l">
+                        <a:buNone/>
+                      </a:pPr>
+                      <a:endParaRPr lang="en-IN" sz="2000" b="1" dirty="0">
+                        <a:solidFill>
+                          <a:schemeClr val="accent1">
+                            <a:lumMod val="50000"/>
+                          </a:schemeClr>
+                        </a:solidFill>
+                      </a:endParaRPr>
+                    </a:p>
+                  </a:txBody>
+                  <a:tcPr anchor="ctr">
+                    <a:lnL>
+                      <a:noFill/>
+                    </a:lnL>
+                    <a:lnR>
+                      <a:noFill/>
+                    </a:lnR>
+                    <a:lnT>
+                      <a:noFill/>
+                    </a:lnT>
+                    <a:lnB>
+                      <a:noFill/>
+                    </a:lnB>
+                    <a:noFill/>
+                  </a:tcPr>
+                </a:tc>
+                <a:tc>
+                  <a:txBody>
+                    <a:bodyPr/>
+                    <a:lstStyle/>
+                    <a:p>
+                      <a:pPr>
+                        <a:buNone/>
+                      </a:pPr>
+                      <a:r>
+                        <a:rPr lang="en-IN" sz="2000" b="1" dirty="0">
+                          <a:solidFill>
+                            <a:schemeClr val="accent1">
+                              <a:lumMod val="50000"/>
+                            </a:schemeClr>
+                          </a:solidFill>
+                        </a:rPr>
+                        <a:t>Purpose</a:t>
+                      </a:r>
+                    </a:p>
+                    <a:p>
+                      <a:pPr>
+                        <a:buNone/>
+                      </a:pPr>
+                      <a:endParaRPr lang="en-IN" sz="2000" b="1" dirty="0">
+                        <a:solidFill>
+                          <a:schemeClr val="accent1">
+                            <a:lumMod val="50000"/>
+                          </a:schemeClr>
+                        </a:solidFill>
+                      </a:endParaRPr>
+                    </a:p>
+                  </a:txBody>
+                  <a:tcPr anchor="ctr">
+                    <a:lnL>
+                      <a:noFill/>
+                    </a:lnL>
+                    <a:lnR>
+                      <a:noFill/>
+                    </a:lnR>
+                    <a:lnT>
+                      <a:noFill/>
+                    </a:lnT>
+                    <a:lnB>
+                      <a:noFill/>
+                    </a:lnB>
+                    <a:noFill/>
+                  </a:tcPr>
+                </a:tc>
+                <a:extLst>
+                  <a:ext uri="{0D108BD9-81ED-4DB2-BD59-A6C34878D82A}">
+                    <a16:rowId xmlns:a16="http://schemas.microsoft.com/office/drawing/2014/main" val="495598307"/>
+                  </a:ext>
+                </a:extLst>
+              </a:tr>
+              <a:tr h="0">
+                <a:tc>
+                  <a:txBody>
+                    <a:bodyPr/>
+                    <a:lstStyle/>
+                    <a:p>
+                      <a:pPr>
+                        <a:buNone/>
+                      </a:pPr>
+                      <a:r>
+                        <a:rPr lang="en-IN" sz="1600" dirty="0">
+                          <a:solidFill>
+                            <a:schemeClr val="accent1">
+                              <a:lumMod val="75000"/>
+                            </a:schemeClr>
+                          </a:solidFill>
+                        </a:rPr>
+                        <a:t>Python</a:t>
+                      </a:r>
+                    </a:p>
+                  </a:txBody>
+                  <a:tcPr anchor="ctr">
+                    <a:lnL>
+                      <a:noFill/>
+                    </a:lnL>
+                    <a:lnR>
+                      <a:noFill/>
+                    </a:lnR>
+                    <a:lnT>
+                      <a:noFill/>
+                    </a:lnT>
+                    <a:lnB>
+                      <a:noFill/>
+                    </a:lnB>
+                    <a:noFill/>
+                  </a:tcPr>
+                </a:tc>
+                <a:tc>
+                  <a:txBody>
+                    <a:bodyPr/>
+                    <a:lstStyle/>
+                    <a:p>
+                      <a:pPr>
+                        <a:buNone/>
+                      </a:pPr>
+                      <a:r>
+                        <a:rPr lang="en-IN" sz="1600">
+                          <a:solidFill>
+                            <a:schemeClr val="accent1">
+                              <a:lumMod val="75000"/>
+                            </a:schemeClr>
+                          </a:solidFill>
+                        </a:rPr>
+                        <a:t>Programming Language</a:t>
+                      </a:r>
+                    </a:p>
+                  </a:txBody>
+                  <a:tcPr anchor="ctr">
+                    <a:lnL>
+                      <a:noFill/>
+                    </a:lnL>
+                    <a:lnR>
+                      <a:noFill/>
+                    </a:lnR>
+                    <a:lnT>
+                      <a:noFill/>
+                    </a:lnT>
+                    <a:lnB>
+                      <a:noFill/>
+                    </a:lnB>
+                    <a:noFill/>
+                  </a:tcPr>
+                </a:tc>
+                <a:extLst>
+                  <a:ext uri="{0D108BD9-81ED-4DB2-BD59-A6C34878D82A}">
+                    <a16:rowId xmlns:a16="http://schemas.microsoft.com/office/drawing/2014/main" val="1410285743"/>
+                  </a:ext>
+                </a:extLst>
+              </a:tr>
+              <a:tr h="0">
+                <a:tc>
+                  <a:txBody>
+                    <a:bodyPr/>
+                    <a:lstStyle/>
+                    <a:p>
+                      <a:pPr>
+                        <a:buNone/>
+                      </a:pPr>
+                      <a:r>
+                        <a:rPr lang="en-IN" sz="1600" dirty="0">
+                          <a:solidFill>
+                            <a:schemeClr val="accent1">
+                              <a:lumMod val="75000"/>
+                            </a:schemeClr>
+                          </a:solidFill>
+                        </a:rPr>
+                        <a:t>Visual Studio Code</a:t>
+                      </a:r>
+                    </a:p>
+                  </a:txBody>
+                  <a:tcPr anchor="ctr">
+                    <a:lnL>
+                      <a:noFill/>
+                    </a:lnL>
+                    <a:lnR>
+                      <a:noFill/>
+                    </a:lnR>
+                    <a:lnT>
+                      <a:noFill/>
+                    </a:lnT>
+                    <a:lnB>
+                      <a:noFill/>
+                    </a:lnB>
+                    <a:noFill/>
+                  </a:tcPr>
+                </a:tc>
+                <a:tc>
+                  <a:txBody>
+                    <a:bodyPr/>
+                    <a:lstStyle/>
+                    <a:p>
+                      <a:pPr>
+                        <a:buNone/>
+                      </a:pPr>
+                      <a:r>
+                        <a:rPr lang="en-IN" sz="1600" dirty="0">
+                          <a:solidFill>
+                            <a:schemeClr val="accent1">
+                              <a:lumMod val="75000"/>
+                            </a:schemeClr>
+                          </a:solidFill>
+                        </a:rPr>
+                        <a:t>Code Editor</a:t>
+                      </a:r>
+                    </a:p>
+                  </a:txBody>
+                  <a:tcPr anchor="ctr">
+                    <a:lnL>
+                      <a:noFill/>
+                    </a:lnL>
+                    <a:lnR>
+                      <a:noFill/>
+                    </a:lnR>
+                    <a:lnT>
+                      <a:noFill/>
+                    </a:lnT>
+                    <a:lnB>
+                      <a:noFill/>
+                    </a:lnB>
+                    <a:noFill/>
+                  </a:tcPr>
+                </a:tc>
+                <a:extLst>
+                  <a:ext uri="{0D108BD9-81ED-4DB2-BD59-A6C34878D82A}">
+                    <a16:rowId xmlns:a16="http://schemas.microsoft.com/office/drawing/2014/main" val="3516500447"/>
+                  </a:ext>
+                </a:extLst>
+              </a:tr>
+              <a:tr h="0">
+                <a:tc>
+                  <a:txBody>
+                    <a:bodyPr/>
+                    <a:lstStyle/>
+                    <a:p>
+                      <a:pPr>
+                        <a:buNone/>
+                      </a:pPr>
+                      <a:r>
+                        <a:rPr lang="en-IN" sz="1600" dirty="0">
+                          <a:solidFill>
+                            <a:schemeClr val="accent1">
+                              <a:lumMod val="75000"/>
+                            </a:schemeClr>
+                          </a:solidFill>
+                        </a:rPr>
+                        <a:t>Object-Oriented Programming</a:t>
+                      </a:r>
+                    </a:p>
+                  </a:txBody>
+                  <a:tcPr anchor="ctr">
+                    <a:lnL>
+                      <a:noFill/>
+                    </a:lnL>
+                    <a:lnR>
+                      <a:noFill/>
+                    </a:lnR>
+                    <a:lnT>
+                      <a:noFill/>
+                    </a:lnT>
+                    <a:lnB>
+                      <a:noFill/>
+                    </a:lnB>
+                    <a:noFill/>
+                  </a:tcPr>
+                </a:tc>
+                <a:tc>
+                  <a:txBody>
+                    <a:bodyPr/>
+                    <a:lstStyle/>
+                    <a:p>
+                      <a:pPr>
+                        <a:buNone/>
+                      </a:pPr>
+                      <a:r>
+                        <a:rPr lang="en-IN" sz="1600" dirty="0">
+                          <a:solidFill>
+                            <a:schemeClr val="accent1">
+                              <a:lumMod val="75000"/>
+                            </a:schemeClr>
+                          </a:solidFill>
+                        </a:rPr>
+                        <a:t>Application Design</a:t>
+                      </a:r>
+                    </a:p>
+                  </a:txBody>
+                  <a:tcPr anchor="ctr">
+                    <a:lnL>
+                      <a:noFill/>
+                    </a:lnL>
+                    <a:lnR>
+                      <a:noFill/>
+                    </a:lnR>
+                    <a:lnT>
+                      <a:noFill/>
+                    </a:lnT>
+                    <a:lnB>
+                      <a:noFill/>
+                    </a:lnB>
+                    <a:noFill/>
+                  </a:tcPr>
+                </a:tc>
+                <a:extLst>
+                  <a:ext uri="{0D108BD9-81ED-4DB2-BD59-A6C34878D82A}">
+                    <a16:rowId xmlns:a16="http://schemas.microsoft.com/office/drawing/2014/main" val="487618927"/>
+                  </a:ext>
+                </a:extLst>
+              </a:tr>
+              <a:tr h="0">
+                <a:tc>
+                  <a:txBody>
+                    <a:bodyPr/>
+                    <a:lstStyle/>
+                    <a:p>
+                      <a:pPr>
+                        <a:buNone/>
+                      </a:pPr>
+                      <a:r>
+                        <a:rPr lang="en-IN" sz="1600">
+                          <a:solidFill>
+                            <a:schemeClr val="accent1">
+                              <a:lumMod val="75000"/>
+                            </a:schemeClr>
+                          </a:solidFill>
+                        </a:rPr>
+                        <a:t>Dictionary</a:t>
+                      </a:r>
+                    </a:p>
+                  </a:txBody>
+                  <a:tcPr anchor="ctr">
+                    <a:lnL>
+                      <a:noFill/>
+                    </a:lnL>
+                    <a:lnR>
+                      <a:noFill/>
+                    </a:lnR>
+                    <a:lnT>
+                      <a:noFill/>
+                    </a:lnT>
+                    <a:lnB>
+                      <a:noFill/>
+                    </a:lnB>
+                    <a:noFill/>
+                  </a:tcPr>
+                </a:tc>
+                <a:tc>
+                  <a:txBody>
+                    <a:bodyPr/>
+                    <a:lstStyle/>
+                    <a:p>
+                      <a:pPr>
+                        <a:buNone/>
+                      </a:pPr>
+                      <a:r>
+                        <a:rPr lang="en-IN" sz="1600" dirty="0">
+                          <a:solidFill>
+                            <a:schemeClr val="accent1">
+                              <a:lumMod val="75000"/>
+                            </a:schemeClr>
+                          </a:solidFill>
+                        </a:rPr>
+                        <a:t>In-memory Data Storage</a:t>
+                      </a:r>
+                    </a:p>
+                  </a:txBody>
+                  <a:tcPr anchor="ctr">
+                    <a:lnL>
+                      <a:noFill/>
+                    </a:lnL>
+                    <a:lnR>
+                      <a:noFill/>
+                    </a:lnR>
+                    <a:lnT>
+                      <a:noFill/>
+                    </a:lnT>
+                    <a:lnB>
+                      <a:noFill/>
+                    </a:lnB>
+                    <a:noFill/>
+                  </a:tcPr>
+                </a:tc>
+                <a:extLst>
+                  <a:ext uri="{0D108BD9-81ED-4DB2-BD59-A6C34878D82A}">
+                    <a16:rowId xmlns:a16="http://schemas.microsoft.com/office/drawing/2014/main" val="862105421"/>
+                  </a:ext>
+                </a:extLst>
+              </a:tr>
+              <a:tr h="0">
+                <a:tc>
+                  <a:txBody>
+                    <a:bodyPr/>
+                    <a:lstStyle/>
+                    <a:p>
+                      <a:pPr>
+                        <a:buNone/>
+                      </a:pPr>
+                      <a:r>
+                        <a:rPr lang="en-IN" sz="1600" dirty="0">
+                          <a:solidFill>
+                            <a:schemeClr val="accent1">
+                              <a:lumMod val="75000"/>
+                            </a:schemeClr>
+                          </a:solidFill>
+                        </a:rPr>
+                        <a:t>File Handling</a:t>
+                      </a:r>
+                    </a:p>
+                  </a:txBody>
+                  <a:tcPr anchor="ctr">
+                    <a:lnL>
+                      <a:noFill/>
+                    </a:lnL>
+                    <a:lnR>
+                      <a:noFill/>
+                    </a:lnR>
+                    <a:lnT>
+                      <a:noFill/>
+                    </a:lnT>
+                    <a:lnB>
+                      <a:noFill/>
+                    </a:lnB>
+                    <a:noFill/>
+                  </a:tcPr>
+                </a:tc>
+                <a:tc>
+                  <a:txBody>
+                    <a:bodyPr/>
+                    <a:lstStyle/>
+                    <a:p>
+                      <a:pPr>
+                        <a:buNone/>
+                      </a:pPr>
+                      <a:r>
+                        <a:rPr lang="en-IN" sz="1600" dirty="0">
+                          <a:solidFill>
+                            <a:schemeClr val="accent1">
+                              <a:lumMod val="75000"/>
+                            </a:schemeClr>
+                          </a:solidFill>
+                        </a:rPr>
+                        <a:t>Store Employee Records</a:t>
+                      </a:r>
+                    </a:p>
+                  </a:txBody>
+                  <a:tcPr anchor="ctr">
+                    <a:lnL>
+                      <a:noFill/>
+                    </a:lnL>
+                    <a:lnR>
+                      <a:noFill/>
+                    </a:lnR>
+                    <a:lnT>
+                      <a:noFill/>
+                    </a:lnT>
+                    <a:lnB>
+                      <a:noFill/>
+                    </a:lnB>
+                    <a:noFill/>
+                  </a:tcPr>
+                </a:tc>
+                <a:extLst>
+                  <a:ext uri="{0D108BD9-81ED-4DB2-BD59-A6C34878D82A}">
+                    <a16:rowId xmlns:a16="http://schemas.microsoft.com/office/drawing/2014/main" val="3649305612"/>
+                  </a:ext>
+                </a:extLst>
+              </a:tr>
+              <a:tr h="0">
+                <a:tc>
+                  <a:txBody>
+                    <a:bodyPr/>
+                    <a:lstStyle/>
+                    <a:p>
+                      <a:pPr>
+                        <a:buNone/>
+                      </a:pPr>
+                      <a:r>
+                        <a:rPr lang="en-IN" sz="1600">
+                          <a:solidFill>
+                            <a:schemeClr val="accent1">
+                              <a:lumMod val="75000"/>
+                            </a:schemeClr>
+                          </a:solidFill>
+                        </a:rPr>
+                        <a:t>Text File (.txt)</a:t>
+                      </a:r>
+                    </a:p>
+                  </a:txBody>
+                  <a:tcPr anchor="ctr">
+                    <a:lnL>
+                      <a:noFill/>
+                    </a:lnL>
+                    <a:lnR>
+                      <a:noFill/>
+                    </a:lnR>
+                    <a:lnT>
+                      <a:noFill/>
+                    </a:lnT>
+                    <a:lnB>
+                      <a:noFill/>
+                    </a:lnB>
+                    <a:noFill/>
+                  </a:tcPr>
+                </a:tc>
+                <a:tc>
+                  <a:txBody>
+                    <a:bodyPr/>
+                    <a:lstStyle/>
+                    <a:p>
+                      <a:pPr>
+                        <a:buNone/>
+                      </a:pPr>
+                      <a:r>
+                        <a:rPr lang="en-IN" sz="1600">
+                          <a:solidFill>
+                            <a:schemeClr val="accent1">
+                              <a:lumMod val="75000"/>
+                            </a:schemeClr>
+                          </a:solidFill>
+                        </a:rPr>
+                        <a:t>Persistent Data Storage</a:t>
+                      </a:r>
+                    </a:p>
+                  </a:txBody>
+                  <a:tcPr anchor="ctr">
+                    <a:lnL>
+                      <a:noFill/>
+                    </a:lnL>
+                    <a:lnR>
+                      <a:noFill/>
+                    </a:lnR>
+                    <a:lnT>
+                      <a:noFill/>
+                    </a:lnT>
+                    <a:lnB>
+                      <a:noFill/>
+                    </a:lnB>
+                    <a:noFill/>
+                  </a:tcPr>
+                </a:tc>
+                <a:extLst>
+                  <a:ext uri="{0D108BD9-81ED-4DB2-BD59-A6C34878D82A}">
+                    <a16:rowId xmlns:a16="http://schemas.microsoft.com/office/drawing/2014/main" val="2215326194"/>
+                  </a:ext>
+                </a:extLst>
+              </a:tr>
+              <a:tr h="0">
+                <a:tc>
+                  <a:txBody>
+                    <a:bodyPr/>
+                    <a:lstStyle/>
+                    <a:p>
+                      <a:pPr>
+                        <a:buNone/>
+                      </a:pPr>
+                      <a:r>
+                        <a:rPr lang="en-IN" sz="1600" dirty="0">
+                          <a:solidFill>
+                            <a:schemeClr val="accent1">
+                              <a:lumMod val="75000"/>
+                            </a:schemeClr>
+                          </a:solidFill>
+                        </a:rPr>
+                        <a:t>Git &amp; GitHub (Optional)</a:t>
+                      </a:r>
+                    </a:p>
+                    <a:p>
+                      <a:pPr>
+                        <a:buNone/>
+                      </a:pPr>
+                      <a:endParaRPr lang="en-IN" sz="1600" dirty="0">
+                        <a:solidFill>
+                          <a:schemeClr val="accent1">
+                            <a:lumMod val="75000"/>
+                          </a:schemeClr>
+                        </a:solidFill>
+                      </a:endParaRPr>
+                    </a:p>
+                  </a:txBody>
+                  <a:tcPr anchor="ctr">
+                    <a:lnL>
+                      <a:noFill/>
+                    </a:lnL>
+                    <a:lnR>
+                      <a:noFill/>
+                    </a:lnR>
+                    <a:lnT>
+                      <a:noFill/>
+                    </a:lnT>
+                    <a:lnB>
+                      <a:noFill/>
+                    </a:lnB>
+                    <a:noFill/>
+                  </a:tcPr>
+                </a:tc>
+                <a:tc>
+                  <a:txBody>
+                    <a:bodyPr/>
+                    <a:lstStyle/>
+                    <a:p>
+                      <a:pPr>
+                        <a:buNone/>
+                      </a:pPr>
+                      <a:r>
+                        <a:rPr lang="en-IN" sz="1600" dirty="0">
+                          <a:solidFill>
+                            <a:schemeClr val="accent1">
+                              <a:lumMod val="75000"/>
+                            </a:schemeClr>
+                          </a:solidFill>
+                        </a:rPr>
+                        <a:t>Version Control</a:t>
+                      </a:r>
+                    </a:p>
+                    <a:p>
+                      <a:pPr>
+                        <a:buNone/>
+                      </a:pPr>
+                      <a:endParaRPr lang="en-IN" sz="1600" dirty="0">
+                        <a:solidFill>
+                          <a:schemeClr val="accent1">
+                            <a:lumMod val="75000"/>
+                          </a:schemeClr>
+                        </a:solidFill>
+                      </a:endParaRPr>
+                    </a:p>
+                  </a:txBody>
+                  <a:tcPr anchor="ctr">
+                    <a:lnL>
+                      <a:noFill/>
+                    </a:lnL>
+                    <a:lnR>
+                      <a:noFill/>
+                    </a:lnR>
+                    <a:lnT>
+                      <a:noFill/>
+                    </a:lnT>
+                    <a:lnB>
+                      <a:noFill/>
+                    </a:lnB>
+                    <a:noFill/>
+                  </a:tcPr>
+                </a:tc>
+                <a:extLst>
+                  <a:ext uri="{0D108BD9-81ED-4DB2-BD59-A6C34878D82A}">
+                    <a16:rowId xmlns:a16="http://schemas.microsoft.com/office/drawing/2014/main" val="101923792"/>
+                  </a:ext>
+                </a:extLst>
+              </a:tr>
+            </a:tbl>
+          </a:graphicData>
+        </a:graphic>
+      </p:graphicFrame>
+    </p:spTree>
+    <p:extLst>
+      <p:ext uri="{BB962C8B-B14F-4D97-AF65-F5344CB8AC3E}">
+        <p14:creationId xmlns:p14="http://schemas.microsoft.com/office/powerpoint/2010/main" val="1281065388"/>
+      </p:ext>
+    </p:extLst>
+  </p:cSld>
+  <p:clrMapOvr>
+    <a:masterClrMapping/>
+  </p:clrMapOvr>
+</p:sld>
+</file>
+
+<file path=ppt/slides/slide9.xml><?xml version="1.0" encoding="utf-8"?>
+<p:sld xmlns:a="http://schemas.openxmlformats.org/drawingml/2006/main" xmlns:r="http://schemas.openxmlformats.org/officeDocument/2006/relationships" xmlns:p="http://schemas.openxmlformats.org/presentationml/2006/main">
   <p:cSld name="Slide 9">
     <p:spTree>
       <p:nvGrpSpPr>
@@ -8222,7 +9962,7 @@
         </p:nvSpPr>
         <p:spPr>
           <a:xfrm>
-            <a:off x="2235484" y="528298"/>
+            <a:off x="2109651" y="351118"/>
             <a:ext cx="4671492" cy="354360"/>
           </a:xfrm>
           <a:prstGeom prst="rect">
@@ -8264,7 +10004,7 @@
         </p:nvSpPr>
         <p:spPr>
           <a:xfrm>
-            <a:off x="1554724" y="1011990"/>
+            <a:off x="1417160" y="872473"/>
             <a:ext cx="6211658" cy="226814"/>
           </a:xfrm>
           <a:prstGeom prst="rect">
@@ -8314,8 +10054,8 @@
         </p:blipFill>
         <p:spPr>
           <a:xfrm>
-            <a:off x="496119" y="1469572"/>
-            <a:ext cx="1482904" cy="964126"/>
+            <a:off x="429407" y="1360464"/>
+            <a:ext cx="1549616" cy="1609860"/>
           </a:xfrm>
           <a:prstGeom prst="rect">
             <a:avLst/>
@@ -8330,7 +10070,7 @@
         </p:nvSpPr>
         <p:spPr>
           <a:xfrm>
-            <a:off x="496119" y="2610878"/>
+            <a:off x="416874" y="3217365"/>
             <a:ext cx="1772022" cy="221456"/>
           </a:xfrm>
           <a:prstGeom prst="rect">
@@ -8372,7 +10112,7 @@
         </p:nvSpPr>
         <p:spPr>
           <a:xfrm>
-            <a:off x="496119" y="2917389"/>
+            <a:off x="496119" y="3546202"/>
             <a:ext cx="1613532" cy="1073314"/>
           </a:xfrm>
           <a:prstGeom prst="rect">
@@ -8424,8 +10164,8 @@
         </p:blipFill>
         <p:spPr>
           <a:xfrm>
-            <a:off x="2488474" y="1469573"/>
-            <a:ext cx="1397726" cy="964126"/>
+            <a:off x="2488473" y="1360465"/>
+            <a:ext cx="1549615" cy="1634584"/>
           </a:xfrm>
           <a:prstGeom prst="rect">
             <a:avLst/>
@@ -8440,7 +10180,7 @@
         </p:nvSpPr>
         <p:spPr>
           <a:xfrm>
-            <a:off x="2578298" y="2610878"/>
+            <a:off x="2787721" y="3224510"/>
             <a:ext cx="1772022" cy="221456"/>
           </a:xfrm>
           <a:prstGeom prst="rect">
@@ -8482,7 +10222,7 @@
         </p:nvSpPr>
         <p:spPr>
           <a:xfrm>
-            <a:off x="2419883" y="2917389"/>
+            <a:off x="2629083" y="3511588"/>
             <a:ext cx="1512037" cy="1021062"/>
           </a:xfrm>
           <a:prstGeom prst="rect">
@@ -8534,8 +10274,8 @@
         </p:blipFill>
         <p:spPr>
           <a:xfrm>
-            <a:off x="4572000" y="2039638"/>
-            <a:ext cx="1600589" cy="1073314"/>
+            <a:off x="4660477" y="1369646"/>
+            <a:ext cx="1663929" cy="1609861"/>
           </a:xfrm>
           <a:prstGeom prst="rect">
             <a:avLst/>
@@ -8644,8 +10384,8 @@
         </p:blipFill>
         <p:spPr>
           <a:xfrm>
-            <a:off x="6742806" y="2039638"/>
-            <a:ext cx="1600589" cy="1073313"/>
+            <a:off x="6742806" y="1360465"/>
+            <a:ext cx="1600589" cy="1689712"/>
           </a:xfrm>
           <a:prstGeom prst="rect">
             <a:avLst/>
@@ -8744,653 +10484,6 @@
             <a:extLst>
               <a:ext uri="{FF2B5EF4-FFF2-40B4-BE49-F238E27FC236}">
                 <a16:creationId xmlns:a16="http://schemas.microsoft.com/office/drawing/2014/main" id="{3BCCEE38-CC0E-747B-72FE-2D81A6E33B35}"/>
-              </a:ext>
-            </a:extLst>
-          </p:cNvPr>
-          <p:cNvSpPr>
-            <a:spLocks noGrp="1" noRot="1" noMove="1" noResize="1" noEditPoints="1" noAdjustHandles="1" noChangeArrowheads="1" noChangeShapeType="1"/>
-          </p:cNvSpPr>
-          <p:nvPr/>
-        </p:nvSpPr>
-        <p:spPr>
-          <a:xfrm>
-            <a:off x="8022077" y="4833257"/>
-            <a:ext cx="1070042" cy="254725"/>
-          </a:xfrm>
-          <a:prstGeom prst="roundRect">
-            <a:avLst/>
-          </a:prstGeom>
-          <a:ln>
-            <a:solidFill>
-              <a:schemeClr val="bg1"/>
-            </a:solidFill>
-          </a:ln>
-        </p:spPr>
-        <p:style>
-          <a:lnRef idx="2">
-            <a:schemeClr val="accent1">
-              <a:shade val="15000"/>
-            </a:schemeClr>
-          </a:lnRef>
-          <a:fillRef idx="1001">
-            <a:schemeClr val="lt1"/>
-          </a:fillRef>
-          <a:effectRef idx="0">
-            <a:schemeClr val="accent1"/>
-          </a:effectRef>
-          <a:fontRef idx="minor">
-            <a:schemeClr val="lt1"/>
-          </a:fontRef>
-        </p:style>
-        <p:txBody>
-          <a:bodyPr rtlCol="0" anchor="ctr"/>
-          <a:lstStyle/>
-          <a:p>
-            <a:pPr algn="ctr"/>
-            <a:endParaRPr lang="en-IN"/>
-          </a:p>
-        </p:txBody>
-      </p:sp>
-    </p:spTree>
-  </p:cSld>
-  <p:clrMapOvr>
-    <a:masterClrMapping/>
-  </p:clrMapOvr>
-</p:sld>
-</file>
-
-<file path=ppt/slides/slide9.xml><?xml version="1.0" encoding="utf-8"?>
-<p:sld xmlns:a="http://schemas.openxmlformats.org/drawingml/2006/main" xmlns:r="http://schemas.openxmlformats.org/officeDocument/2006/relationships" xmlns:p="http://schemas.openxmlformats.org/presentationml/2006/main">
-  <p:cSld name="Slide 10">
-    <p:spTree>
-      <p:nvGrpSpPr>
-        <p:cNvPr id="1" name=""/>
-        <p:cNvGrpSpPr/>
-        <p:nvPr/>
-      </p:nvGrpSpPr>
-      <p:grpSpPr>
-        <a:xfrm>
-          <a:off x="0" y="0"/>
-          <a:ext cx="0" cy="0"/>
-          <a:chOff x="0" y="0"/>
-          <a:chExt cx="0" cy="0"/>
-        </a:xfrm>
-      </p:grpSpPr>
-      <p:sp>
-        <p:nvSpPr>
-          <p:cNvPr id="2" name="Shape 0"/>
-          <p:cNvSpPr/>
-          <p:nvPr/>
-        </p:nvSpPr>
-        <p:spPr>
-          <a:xfrm>
-            <a:off x="496119" y="428699"/>
-            <a:ext cx="768102" cy="244376"/>
-          </a:xfrm>
-          <a:prstGeom prst="roundRect">
-            <a:avLst>
-              <a:gd name="adj" fmla="val 18274"/>
-            </a:avLst>
-          </a:prstGeom>
-          <a:noFill/>
-          <a:ln/>
-          <a:effectLst>
-            <a:outerShdw blurRad="101600" dist="50800" dir="16200000" algn="bl" rotWithShape="0">
-              <a:srgbClr val="26A688">
-                <a:alpha val="100000"/>
-              </a:srgbClr>
-            </a:outerShdw>
-          </a:effectLst>
-        </p:spPr>
-      </p:sp>
-      <p:sp>
-        <p:nvSpPr>
-          <p:cNvPr id="5" name="Text 3"/>
-          <p:cNvSpPr/>
-          <p:nvPr/>
-        </p:nvSpPr>
-        <p:spPr>
-          <a:xfrm>
-            <a:off x="3386734" y="550887"/>
-            <a:ext cx="2060478" cy="332259"/>
-          </a:xfrm>
-          <a:prstGeom prst="rect">
-            <a:avLst/>
-          </a:prstGeom>
-          <a:noFill/>
-          <a:ln/>
-        </p:spPr>
-        <p:txBody>
-          <a:bodyPr wrap="none" lIns="0" tIns="0" rIns="0" bIns="0" rtlCol="0" anchor="t"/>
-          <a:lstStyle/>
-          <a:p>
-            <a:pPr marL="0" indent="0" algn="ctr">
-              <a:lnSpc>
-                <a:spcPct val="104000"/>
-              </a:lnSpc>
-              <a:buNone/>
-            </a:pPr>
-            <a:r>
-              <a:rPr lang="en-US" sz="2000" b="1" dirty="0">
-                <a:solidFill>
-                  <a:srgbClr val="333F70"/>
-                </a:solidFill>
-                <a:latin typeface="Unbounded Bold" pitchFamily="34" charset="0"/>
-                <a:ea typeface="Unbounded Bold" pitchFamily="34" charset="-122"/>
-                <a:cs typeface="Unbounded Bold" pitchFamily="34" charset="-120"/>
-              </a:rPr>
-              <a:t>Advantages</a:t>
-            </a:r>
-            <a:endParaRPr lang="en-US" sz="2000" dirty="0"/>
-          </a:p>
-        </p:txBody>
-      </p:sp>
-      <p:sp>
-        <p:nvSpPr>
-          <p:cNvPr id="6" name="Shape 4"/>
-          <p:cNvSpPr/>
-          <p:nvPr/>
-        </p:nvSpPr>
-        <p:spPr>
-          <a:xfrm>
-            <a:off x="589902" y="1241971"/>
-            <a:ext cx="3935462" cy="1704752"/>
-          </a:xfrm>
-          <a:prstGeom prst="roundRect">
-            <a:avLst>
-              <a:gd name="adj" fmla="val 5613"/>
-            </a:avLst>
-          </a:prstGeom>
-          <a:solidFill>
-            <a:srgbClr val="DDF8F2"/>
-          </a:solidFill>
-          <a:ln/>
-        </p:spPr>
-      </p:sp>
-      <p:sp>
-        <p:nvSpPr>
-          <p:cNvPr id="7" name="Text 5"/>
-          <p:cNvSpPr/>
-          <p:nvPr/>
-        </p:nvSpPr>
-        <p:spPr>
-          <a:xfrm>
-            <a:off x="722806" y="1366540"/>
-            <a:ext cx="2165300" cy="207690"/>
-          </a:xfrm>
-          <a:prstGeom prst="rect">
-            <a:avLst/>
-          </a:prstGeom>
-          <a:noFill/>
-          <a:ln/>
-        </p:spPr>
-        <p:txBody>
-          <a:bodyPr wrap="none" lIns="0" tIns="0" rIns="0" bIns="0" rtlCol="0" anchor="t"/>
-          <a:lstStyle/>
-          <a:p>
-            <a:pPr marL="0" indent="0" algn="l">
-              <a:lnSpc>
-                <a:spcPct val="104000"/>
-              </a:lnSpc>
-              <a:buNone/>
-            </a:pPr>
-            <a:r>
-              <a:rPr lang="en-US" sz="1300" b="1" dirty="0">
-                <a:solidFill>
-                  <a:srgbClr val="333F70"/>
-                </a:solidFill>
-                <a:latin typeface="Unbounded Bold" pitchFamily="34" charset="0"/>
-                <a:ea typeface="Unbounded Bold" pitchFamily="34" charset="-122"/>
-                <a:cs typeface="Unbounded Bold" pitchFamily="34" charset="-120"/>
-              </a:rPr>
-              <a:t>Key Advantages</a:t>
-            </a:r>
-            <a:endParaRPr lang="en-US" sz="1300" dirty="0"/>
-          </a:p>
-        </p:txBody>
-      </p:sp>
-      <p:sp>
-        <p:nvSpPr>
-          <p:cNvPr id="8" name="Text 6"/>
-          <p:cNvSpPr/>
-          <p:nvPr/>
-        </p:nvSpPr>
-        <p:spPr>
-          <a:xfrm>
-            <a:off x="722806" y="1698799"/>
-            <a:ext cx="3669655" cy="1204317"/>
-          </a:xfrm>
-          <a:prstGeom prst="rect">
-            <a:avLst/>
-          </a:prstGeom>
-          <a:noFill/>
-          <a:ln/>
-        </p:spPr>
-        <p:txBody>
-          <a:bodyPr wrap="square" lIns="0" tIns="0" rIns="0" bIns="0" rtlCol="0" anchor="t">
-            <a:normAutofit/>
-          </a:bodyPr>
-          <a:lstStyle/>
-          <a:p>
-            <a:pPr marL="203200" indent="-203200" algn="l">
-              <a:lnSpc>
-                <a:spcPct val="129000"/>
-              </a:lnSpc>
-              <a:buSzPct val="100000"/>
-              <a:buChar char="•"/>
-            </a:pPr>
-            <a:r>
-              <a:rPr lang="en-US" sz="1100" dirty="0">
-                <a:solidFill>
-                  <a:srgbClr val="333F70"/>
-                </a:solidFill>
-                <a:latin typeface="Open Sans" pitchFamily="34" charset="0"/>
-                <a:ea typeface="Open Sans" pitchFamily="34" charset="-122"/>
-                <a:cs typeface="Open Sans" pitchFamily="34" charset="-120"/>
-              </a:rPr>
-              <a:t>Simple console-based interface.</a:t>
-            </a:r>
-            <a:endParaRPr lang="en-US" sz="1100" dirty="0"/>
-          </a:p>
-          <a:p>
-            <a:pPr marL="203200" indent="-203200" algn="l">
-              <a:lnSpc>
-                <a:spcPct val="129000"/>
-              </a:lnSpc>
-              <a:buSzPct val="100000"/>
-              <a:buChar char="•"/>
-            </a:pPr>
-            <a:r>
-              <a:rPr lang="en-US" sz="1100" dirty="0">
-                <a:solidFill>
-                  <a:srgbClr val="333F70"/>
-                </a:solidFill>
-                <a:latin typeface="Open Sans" pitchFamily="34" charset="0"/>
-                <a:ea typeface="Open Sans" pitchFamily="34" charset="-122"/>
-                <a:cs typeface="Open Sans" pitchFamily="34" charset="-120"/>
-              </a:rPr>
-              <a:t>Fast dictionary-powered search by Employee ID.</a:t>
-            </a:r>
-            <a:endParaRPr lang="en-US" sz="1100" dirty="0"/>
-          </a:p>
-          <a:p>
-            <a:pPr marL="203200" indent="-203200" algn="l">
-              <a:lnSpc>
-                <a:spcPct val="129000"/>
-              </a:lnSpc>
-              <a:buSzPct val="100000"/>
-              <a:buChar char="•"/>
-            </a:pPr>
-            <a:r>
-              <a:rPr lang="en-US" sz="1100" dirty="0">
-                <a:solidFill>
-                  <a:srgbClr val="333F70"/>
-                </a:solidFill>
-                <a:latin typeface="Open Sans" pitchFamily="34" charset="0"/>
-                <a:ea typeface="Open Sans" pitchFamily="34" charset="-122"/>
-                <a:cs typeface="Open Sans" pitchFamily="34" charset="-120"/>
-              </a:rPr>
-              <a:t>Modular file structure for easy maintenance.</a:t>
-            </a:r>
-            <a:endParaRPr lang="en-US" sz="1100" dirty="0"/>
-          </a:p>
-          <a:p>
-            <a:pPr marL="203200" indent="-203200" algn="l">
-              <a:lnSpc>
-                <a:spcPct val="129000"/>
-              </a:lnSpc>
-              <a:buSzPct val="100000"/>
-              <a:buChar char="•"/>
-            </a:pPr>
-            <a:r>
-              <a:rPr lang="en-US" sz="1100" dirty="0">
-                <a:solidFill>
-                  <a:srgbClr val="333F70"/>
-                </a:solidFill>
-                <a:latin typeface="Open Sans" pitchFamily="34" charset="0"/>
-                <a:ea typeface="Open Sans" pitchFamily="34" charset="-122"/>
-                <a:cs typeface="Open Sans" pitchFamily="34" charset="-120"/>
-              </a:rPr>
-              <a:t>Demonstrates all major OOP principles.</a:t>
-            </a:r>
-            <a:endParaRPr lang="en-US" sz="1100" dirty="0"/>
-          </a:p>
-          <a:p>
-            <a:pPr marL="203200" indent="-203200" algn="l">
-              <a:lnSpc>
-                <a:spcPct val="129000"/>
-              </a:lnSpc>
-              <a:buSzPct val="100000"/>
-              <a:buChar char="•"/>
-            </a:pPr>
-            <a:r>
-              <a:rPr lang="en-US" sz="1100" dirty="0">
-                <a:solidFill>
-                  <a:srgbClr val="333F70"/>
-                </a:solidFill>
-                <a:latin typeface="Open Sans" pitchFamily="34" charset="0"/>
-                <a:ea typeface="Open Sans" pitchFamily="34" charset="-122"/>
-                <a:cs typeface="Open Sans" pitchFamily="34" charset="-120"/>
-              </a:rPr>
-              <a:t>Reusable and extensible codebase.</a:t>
-            </a:r>
-            <a:endParaRPr lang="en-US" sz="1100" dirty="0"/>
-          </a:p>
-        </p:txBody>
-      </p:sp>
-      <p:sp>
-        <p:nvSpPr>
-          <p:cNvPr id="9" name="Text 7"/>
-          <p:cNvSpPr/>
-          <p:nvPr/>
-        </p:nvSpPr>
-        <p:spPr>
-          <a:xfrm>
-            <a:off x="4961131" y="1366540"/>
-            <a:ext cx="2581405" cy="207690"/>
-          </a:xfrm>
-          <a:prstGeom prst="rect">
-            <a:avLst/>
-          </a:prstGeom>
-          <a:noFill/>
-          <a:ln/>
-        </p:spPr>
-        <p:txBody>
-          <a:bodyPr wrap="none" lIns="0" tIns="0" rIns="0" bIns="0" rtlCol="0" anchor="t"/>
-          <a:lstStyle/>
-          <a:p>
-            <a:pPr marL="0" indent="0" algn="l">
-              <a:lnSpc>
-                <a:spcPct val="104000"/>
-              </a:lnSpc>
-              <a:buNone/>
-            </a:pPr>
-            <a:r>
-              <a:rPr lang="en-US" sz="1300" b="1" dirty="0">
-                <a:solidFill>
-                  <a:srgbClr val="333F70"/>
-                </a:solidFill>
-                <a:latin typeface="Unbounded Bold" pitchFamily="34" charset="0"/>
-                <a:ea typeface="Unbounded Bold" pitchFamily="34" charset="-122"/>
-                <a:cs typeface="Unbounded Bold" pitchFamily="34" charset="-120"/>
-              </a:rPr>
-              <a:t>Future Enhancements</a:t>
-            </a:r>
-            <a:endParaRPr lang="en-US" sz="1300" dirty="0"/>
-          </a:p>
-        </p:txBody>
-      </p:sp>
-      <p:sp>
-        <p:nvSpPr>
-          <p:cNvPr id="10" name="Text 8"/>
-          <p:cNvSpPr/>
-          <p:nvPr/>
-        </p:nvSpPr>
-        <p:spPr>
-          <a:xfrm>
-            <a:off x="4961131" y="1698799"/>
-            <a:ext cx="3795435" cy="1204317"/>
-          </a:xfrm>
-          <a:prstGeom prst="rect">
-            <a:avLst/>
-          </a:prstGeom>
-          <a:noFill/>
-          <a:ln/>
-        </p:spPr>
-        <p:txBody>
-          <a:bodyPr wrap="square" lIns="0" tIns="0" rIns="0" bIns="0" rtlCol="0" anchor="t">
-            <a:normAutofit/>
-          </a:bodyPr>
-          <a:lstStyle/>
-          <a:p>
-            <a:pPr marL="203200" indent="-203200" algn="l">
-              <a:lnSpc>
-                <a:spcPct val="129000"/>
-              </a:lnSpc>
-              <a:buSzPct val="100000"/>
-              <a:buChar char="•"/>
-            </a:pPr>
-            <a:r>
-              <a:rPr lang="en-US" sz="1100" dirty="0">
-                <a:solidFill>
-                  <a:srgbClr val="333F70"/>
-                </a:solidFill>
-                <a:latin typeface="Open Sans" pitchFamily="34" charset="0"/>
-                <a:ea typeface="Open Sans" pitchFamily="34" charset="-122"/>
-                <a:cs typeface="Open Sans" pitchFamily="34" charset="-120"/>
-              </a:rPr>
-              <a:t>Login authentication for secure access.</a:t>
-            </a:r>
-            <a:endParaRPr lang="en-US" sz="1100" dirty="0"/>
-          </a:p>
-          <a:p>
-            <a:pPr marL="203200" indent="-203200" algn="l">
-              <a:lnSpc>
-                <a:spcPct val="129000"/>
-              </a:lnSpc>
-              <a:buSzPct val="100000"/>
-              <a:buChar char="•"/>
-            </a:pPr>
-            <a:r>
-              <a:rPr lang="en-US" sz="1100" dirty="0">
-                <a:solidFill>
-                  <a:srgbClr val="333F70"/>
-                </a:solidFill>
-                <a:latin typeface="Open Sans" pitchFamily="34" charset="0"/>
-                <a:ea typeface="Open Sans" pitchFamily="34" charset="-122"/>
-                <a:cs typeface="Open Sans" pitchFamily="34" charset="-120"/>
-              </a:rPr>
-              <a:t>MySQL database integration for scalability.</a:t>
-            </a:r>
-            <a:endParaRPr lang="en-US" sz="1100" dirty="0"/>
-          </a:p>
-          <a:p>
-            <a:pPr marL="203200" indent="-203200" algn="l">
-              <a:lnSpc>
-                <a:spcPct val="129000"/>
-              </a:lnSpc>
-              <a:buSzPct val="100000"/>
-              <a:buChar char="•"/>
-            </a:pPr>
-            <a:r>
-              <a:rPr lang="en-US" sz="1100" dirty="0">
-                <a:solidFill>
-                  <a:srgbClr val="333F70"/>
-                </a:solidFill>
-                <a:latin typeface="Open Sans" pitchFamily="34" charset="0"/>
-                <a:ea typeface="Open Sans" pitchFamily="34" charset="-122"/>
-                <a:cs typeface="Open Sans" pitchFamily="34" charset="-120"/>
-              </a:rPr>
-              <a:t>Employee attendance and leave management.</a:t>
-            </a:r>
-            <a:endParaRPr lang="en-US" sz="1100" dirty="0"/>
-          </a:p>
-          <a:p>
-            <a:pPr marL="203200" indent="-203200" algn="l">
-              <a:lnSpc>
-                <a:spcPct val="129000"/>
-              </a:lnSpc>
-              <a:buSzPct val="100000"/>
-              <a:buChar char="•"/>
-            </a:pPr>
-            <a:r>
-              <a:rPr lang="en-US" sz="1100" dirty="0">
-                <a:solidFill>
-                  <a:srgbClr val="333F70"/>
-                </a:solidFill>
-                <a:latin typeface="Open Sans" pitchFamily="34" charset="0"/>
-                <a:ea typeface="Open Sans" pitchFamily="34" charset="-122"/>
-                <a:cs typeface="Open Sans" pitchFamily="34" charset="-120"/>
-              </a:rPr>
-              <a:t>Salary slip generation and data dashboards.</a:t>
-            </a:r>
-            <a:endParaRPr lang="en-US" sz="1100" dirty="0"/>
-          </a:p>
-        </p:txBody>
-      </p:sp>
-      <p:sp>
-        <p:nvSpPr>
-          <p:cNvPr id="11" name="Shape 9"/>
-          <p:cNvSpPr/>
-          <p:nvPr/>
-        </p:nvSpPr>
-        <p:spPr>
-          <a:xfrm>
-            <a:off x="488677" y="3184987"/>
-            <a:ext cx="8151763" cy="14288"/>
-          </a:xfrm>
-          <a:prstGeom prst="roundRect">
-            <a:avLst>
-              <a:gd name="adj" fmla="val 59998"/>
-            </a:avLst>
-          </a:prstGeom>
-          <a:solidFill>
-            <a:srgbClr val="333F70">
-              <a:alpha val="50000"/>
-            </a:srgbClr>
-          </a:solidFill>
-          <a:ln/>
-        </p:spPr>
-      </p:sp>
-      <p:sp>
-        <p:nvSpPr>
-          <p:cNvPr id="12" name="Shape 10"/>
-          <p:cNvSpPr/>
-          <p:nvPr/>
-        </p:nvSpPr>
-        <p:spPr>
-          <a:xfrm>
-            <a:off x="496119" y="3422464"/>
-            <a:ext cx="8151763" cy="1070061"/>
-          </a:xfrm>
-          <a:prstGeom prst="roundRect">
-            <a:avLst>
-              <a:gd name="adj" fmla="val 7807"/>
-            </a:avLst>
-          </a:prstGeom>
-          <a:solidFill>
-            <a:srgbClr val="D6F5EE"/>
-          </a:solidFill>
-          <a:ln/>
-        </p:spPr>
-      </p:sp>
-      <p:pic>
-        <p:nvPicPr>
-          <p:cNvPr id="13" name="Image 0" descr="preencoded.png"/>
-          <p:cNvPicPr>
-            <a:picLocks noChangeAspect="1"/>
-          </p:cNvPicPr>
-          <p:nvPr/>
-        </p:nvPicPr>
-        <p:blipFill>
-          <a:blip r:embed="rId3"/>
-          <a:stretch>
-            <a:fillRect/>
-          </a:stretch>
-        </p:blipFill>
-        <p:spPr>
-          <a:xfrm>
-            <a:off x="629022" y="3495526"/>
-            <a:ext cx="166092" cy="132904"/>
-          </a:xfrm>
-          <a:prstGeom prst="rect">
-            <a:avLst/>
-          </a:prstGeom>
-        </p:spPr>
-      </p:pic>
-      <p:sp>
-        <p:nvSpPr>
-          <p:cNvPr id="14" name="Text 11"/>
-          <p:cNvSpPr/>
-          <p:nvPr/>
-        </p:nvSpPr>
-        <p:spPr>
-          <a:xfrm>
-            <a:off x="928018" y="3711479"/>
-            <a:ext cx="7586960" cy="590403"/>
-          </a:xfrm>
-          <a:prstGeom prst="rect">
-            <a:avLst/>
-          </a:prstGeom>
-          <a:noFill/>
-          <a:ln/>
-        </p:spPr>
-        <p:txBody>
-          <a:bodyPr wrap="square" lIns="0" tIns="0" rIns="0" bIns="0" rtlCol="0" anchor="t">
-            <a:normAutofit/>
-          </a:bodyPr>
-          <a:lstStyle/>
-          <a:p>
-            <a:pPr marL="0" indent="0" algn="l">
-              <a:lnSpc>
-                <a:spcPct val="129000"/>
-              </a:lnSpc>
-              <a:buNone/>
-            </a:pPr>
-            <a:r>
-              <a:rPr lang="en-US" sz="1050" dirty="0">
-                <a:solidFill>
-                  <a:srgbClr val="000000"/>
-                </a:solidFill>
-                <a:latin typeface="Open Sans" pitchFamily="34" charset="0"/>
-                <a:ea typeface="Open Sans" pitchFamily="34" charset="-122"/>
-                <a:cs typeface="Open Sans" pitchFamily="34" charset="-120"/>
-              </a:rPr>
-              <a:t>The project successfully demonstrates CRUD operations, inheritance, polymorphism, and file handling — forming a strong foundation for a full-scale HR management system.</a:t>
-            </a:r>
-            <a:endParaRPr lang="en-US" sz="1050" dirty="0"/>
-          </a:p>
-        </p:txBody>
-      </p:sp>
-      <p:sp>
-        <p:nvSpPr>
-          <p:cNvPr id="15" name="Text 12"/>
-          <p:cNvSpPr/>
-          <p:nvPr/>
-        </p:nvSpPr>
-        <p:spPr>
-          <a:xfrm>
-            <a:off x="496119" y="4162723"/>
-            <a:ext cx="8151763" cy="552078"/>
-          </a:xfrm>
-          <a:prstGeom prst="rect">
-            <a:avLst/>
-          </a:prstGeom>
-          <a:noFill/>
-          <a:ln/>
-        </p:spPr>
-        <p:txBody>
-          <a:bodyPr wrap="square" lIns="0" tIns="0" rIns="0" bIns="0" rtlCol="0" anchor="t"/>
-          <a:lstStyle/>
-          <a:p>
-            <a:pPr marL="0" indent="0" algn="ctr">
-              <a:lnSpc>
-                <a:spcPct val="129000"/>
-              </a:lnSpc>
-              <a:spcAft>
-                <a:spcPts val="2700"/>
-              </a:spcAft>
-              <a:buNone/>
-            </a:pPr>
-            <a:endParaRPr lang="en-US" sz="1000" dirty="0"/>
-          </a:p>
-          <a:p>
-            <a:pPr marL="0" indent="0" algn="ctr">
-              <a:lnSpc>
-                <a:spcPct val="129000"/>
-              </a:lnSpc>
-              <a:buNone/>
-            </a:pPr>
-            <a:endParaRPr lang="en-US" sz="1000" dirty="0"/>
-          </a:p>
-        </p:txBody>
-      </p:sp>
-      <p:sp>
-        <p:nvSpPr>
-          <p:cNvPr id="17" name="Rectangle: Rounded Corners 16">
-            <a:extLst>
-              <a:ext uri="{FF2B5EF4-FFF2-40B4-BE49-F238E27FC236}">
-                <a16:creationId xmlns:a16="http://schemas.microsoft.com/office/drawing/2014/main" id="{C6510335-9FE5-08E2-AC44-5975592B73E2}"/>
               </a:ext>
             </a:extLst>
           </p:cNvPr>

--- a/Employee-Record-Management-System (1).pptx
+++ b/Employee-Record-Management-System (1).pptx
@@ -9962,7 +9962,7 @@
         </p:nvSpPr>
         <p:spPr>
           <a:xfrm>
-            <a:off x="2109651" y="351118"/>
+            <a:off x="2022920" y="412078"/>
             <a:ext cx="4671492" cy="354360"/>
           </a:xfrm>
           <a:prstGeom prst="rect">
@@ -10004,7 +10004,7 @@
         </p:nvSpPr>
         <p:spPr>
           <a:xfrm>
-            <a:off x="1417160" y="872473"/>
+            <a:off x="393590" y="964245"/>
             <a:ext cx="6211658" cy="226814"/>
           </a:xfrm>
           <a:prstGeom prst="rect">
@@ -10038,40 +10038,16 @@
           </a:p>
         </p:txBody>
       </p:sp>
-      <p:pic>
-        <p:nvPicPr>
-          <p:cNvPr id="7" name="Image 0" descr="preencoded.png"/>
-          <p:cNvPicPr>
-            <a:picLocks noChangeAspect="1"/>
-          </p:cNvPicPr>
-          <p:nvPr/>
-        </p:nvPicPr>
-        <p:blipFill>
-          <a:blip r:embed="rId3"/>
-          <a:stretch>
-            <a:fillRect/>
-          </a:stretch>
-        </p:blipFill>
-        <p:spPr>
-          <a:xfrm>
-            <a:off x="429407" y="1360464"/>
-            <a:ext cx="1549616" cy="1609860"/>
-          </a:xfrm>
-          <a:prstGeom prst="rect">
-            <a:avLst/>
-          </a:prstGeom>
-        </p:spPr>
-      </p:pic>
-      <p:sp>
-        <p:nvSpPr>
-          <p:cNvPr id="8" name="Text 5"/>
-          <p:cNvSpPr/>
-          <p:nvPr/>
-        </p:nvSpPr>
-        <p:spPr>
-          <a:xfrm>
-            <a:off x="416874" y="3217365"/>
-            <a:ext cx="1772022" cy="221456"/>
+      <p:sp>
+        <p:nvSpPr>
+          <p:cNvPr id="11" name="Text 7"/>
+          <p:cNvSpPr/>
+          <p:nvPr/>
+        </p:nvSpPr>
+        <p:spPr>
+          <a:xfrm>
+            <a:off x="2997361" y="4300859"/>
+            <a:ext cx="1004116" cy="221456"/>
           </a:xfrm>
           <a:prstGeom prst="rect">
             <a:avLst/>
@@ -10090,391 +10066,9 @@
               <a:buNone/>
             </a:pPr>
             <a:r>
-              <a:rPr lang="en-US" sz="1350" b="1" dirty="0">
-                <a:solidFill>
-                  <a:srgbClr val="333F70"/>
-                </a:solidFill>
-                <a:latin typeface="Unbounded Bold" pitchFamily="34" charset="0"/>
-                <a:ea typeface="Unbounded Bold" pitchFamily="34" charset="-122"/>
-                <a:cs typeface="Unbounded Bold" pitchFamily="34" charset="-120"/>
-              </a:rPr>
-              <a:t>Add Employee</a:t>
-            </a:r>
-            <a:endParaRPr lang="en-US" sz="1350" dirty="0"/>
-          </a:p>
-        </p:txBody>
-      </p:sp>
-      <p:sp>
-        <p:nvSpPr>
-          <p:cNvPr id="9" name="Text 6"/>
-          <p:cNvSpPr/>
-          <p:nvPr/>
-        </p:nvSpPr>
-        <p:spPr>
-          <a:xfrm>
-            <a:off x="496119" y="3546202"/>
-            <a:ext cx="1613532" cy="1073314"/>
-          </a:xfrm>
-          <a:prstGeom prst="rect">
-            <a:avLst/>
-          </a:prstGeom>
-          <a:noFill/>
-          <a:ln/>
-        </p:spPr>
-        <p:txBody>
-          <a:bodyPr wrap="square" lIns="0" tIns="0" rIns="0" bIns="0" rtlCol="0" anchor="t">
-            <a:normAutofit/>
-          </a:bodyPr>
-          <a:lstStyle/>
-          <a:p>
-            <a:pPr marL="0" indent="0" algn="l">
-              <a:lnSpc>
-                <a:spcPct val="133000"/>
-              </a:lnSpc>
-              <a:buNone/>
-            </a:pPr>
-            <a:r>
-              <a:rPr lang="en-US" sz="1100" dirty="0">
-                <a:solidFill>
-                  <a:srgbClr val="333F70"/>
-                </a:solidFill>
-                <a:latin typeface="Open Sans" pitchFamily="34" charset="0"/>
-                <a:ea typeface="Open Sans" pitchFamily="34" charset="-122"/>
-                <a:cs typeface="Open Sans" pitchFamily="34" charset="-120"/>
-              </a:rPr>
-              <a:t>User enters ID, name, salary, and employee type to create a new record.</a:t>
-            </a:r>
-            <a:endParaRPr lang="en-US" sz="1100" dirty="0"/>
-          </a:p>
-        </p:txBody>
-      </p:sp>
-      <p:pic>
-        <p:nvPicPr>
-          <p:cNvPr id="10" name="Image 1" descr="preencoded.png"/>
-          <p:cNvPicPr>
-            <a:picLocks noChangeAspect="1"/>
-          </p:cNvPicPr>
-          <p:nvPr/>
-        </p:nvPicPr>
-        <p:blipFill>
-          <a:blip r:embed="rId4"/>
-          <a:stretch>
-            <a:fillRect/>
-          </a:stretch>
-        </p:blipFill>
-        <p:spPr>
-          <a:xfrm>
-            <a:off x="2488473" y="1360465"/>
-            <a:ext cx="1549615" cy="1634584"/>
-          </a:xfrm>
-          <a:prstGeom prst="rect">
-            <a:avLst/>
-          </a:prstGeom>
-        </p:spPr>
-      </p:pic>
-      <p:sp>
-        <p:nvSpPr>
-          <p:cNvPr id="11" name="Text 7"/>
-          <p:cNvSpPr/>
-          <p:nvPr/>
-        </p:nvSpPr>
-        <p:spPr>
-          <a:xfrm>
-            <a:off x="2787721" y="3224510"/>
-            <a:ext cx="1772022" cy="221456"/>
-          </a:xfrm>
-          <a:prstGeom prst="rect">
-            <a:avLst/>
-          </a:prstGeom>
-          <a:noFill/>
-          <a:ln/>
-        </p:spPr>
-        <p:txBody>
-          <a:bodyPr wrap="none" lIns="0" tIns="0" rIns="0" bIns="0" rtlCol="0" anchor="t"/>
-          <a:lstStyle/>
-          <a:p>
-            <a:pPr marL="0" indent="0" algn="l">
-              <a:lnSpc>
-                <a:spcPct val="104000"/>
-              </a:lnSpc>
-              <a:buNone/>
-            </a:pPr>
-            <a:r>
-              <a:rPr lang="en-US" sz="1350" b="1" dirty="0">
-                <a:solidFill>
-                  <a:srgbClr val="333F70"/>
-                </a:solidFill>
-                <a:latin typeface="Unbounded Bold" pitchFamily="34" charset="0"/>
-                <a:ea typeface="Unbounded Bold" pitchFamily="34" charset="-122"/>
-                <a:cs typeface="Unbounded Bold" pitchFamily="34" charset="-120"/>
-              </a:rPr>
-              <a:t>View All</a:t>
-            </a:r>
-            <a:endParaRPr lang="en-US" sz="1350" dirty="0"/>
-          </a:p>
-        </p:txBody>
-      </p:sp>
-      <p:sp>
-        <p:nvSpPr>
-          <p:cNvPr id="12" name="Text 8"/>
-          <p:cNvSpPr/>
-          <p:nvPr/>
-        </p:nvSpPr>
-        <p:spPr>
-          <a:xfrm>
-            <a:off x="2629083" y="3511588"/>
-            <a:ext cx="1512037" cy="1021062"/>
-          </a:xfrm>
-          <a:prstGeom prst="rect">
-            <a:avLst/>
-          </a:prstGeom>
-          <a:noFill/>
-          <a:ln/>
-        </p:spPr>
-        <p:txBody>
-          <a:bodyPr wrap="square" lIns="0" tIns="0" rIns="0" bIns="0" rtlCol="0" anchor="t">
-            <a:normAutofit/>
-          </a:bodyPr>
-          <a:lstStyle/>
-          <a:p>
-            <a:pPr marL="0" indent="0" algn="l">
-              <a:lnSpc>
-                <a:spcPct val="133000"/>
-              </a:lnSpc>
-              <a:buNone/>
-            </a:pPr>
-            <a:r>
-              <a:rPr lang="en-US" sz="1100" dirty="0">
-                <a:solidFill>
-                  <a:srgbClr val="333F70"/>
-                </a:solidFill>
-                <a:latin typeface="Open Sans" pitchFamily="34" charset="0"/>
-                <a:ea typeface="Open Sans" pitchFamily="34" charset="-122"/>
-                <a:cs typeface="Open Sans" pitchFamily="34" charset="-120"/>
-              </a:rPr>
-              <a:t>System displays all stored employees in a structured tabular layout.</a:t>
-            </a:r>
-            <a:endParaRPr lang="en-US" sz="1100" dirty="0"/>
-          </a:p>
-        </p:txBody>
-      </p:sp>
-      <p:pic>
-        <p:nvPicPr>
-          <p:cNvPr id="13" name="Image 2" descr="preencoded.png"/>
-          <p:cNvPicPr>
-            <a:picLocks noChangeAspect="1"/>
-          </p:cNvPicPr>
-          <p:nvPr/>
-        </p:nvPicPr>
-        <p:blipFill>
-          <a:blip r:embed="rId5"/>
-          <a:stretch>
-            <a:fillRect/>
-          </a:stretch>
-        </p:blipFill>
-        <p:spPr>
-          <a:xfrm>
-            <a:off x="4660477" y="1369646"/>
-            <a:ext cx="1663929" cy="1609861"/>
-          </a:xfrm>
-          <a:prstGeom prst="rect">
-            <a:avLst/>
-          </a:prstGeom>
-        </p:spPr>
-      </p:pic>
-      <p:sp>
-        <p:nvSpPr>
-          <p:cNvPr id="14" name="Text 9"/>
-          <p:cNvSpPr/>
-          <p:nvPr/>
-        </p:nvSpPr>
-        <p:spPr>
-          <a:xfrm>
-            <a:off x="4660553" y="3290132"/>
-            <a:ext cx="1772022" cy="221456"/>
-          </a:xfrm>
-          <a:prstGeom prst="rect">
-            <a:avLst/>
-          </a:prstGeom>
-          <a:noFill/>
-          <a:ln/>
-        </p:spPr>
-        <p:txBody>
-          <a:bodyPr wrap="none" lIns="0" tIns="0" rIns="0" bIns="0" rtlCol="0" anchor="t"/>
-          <a:lstStyle/>
-          <a:p>
-            <a:pPr marL="0" indent="0" algn="l">
-              <a:lnSpc>
-                <a:spcPct val="104000"/>
-              </a:lnSpc>
-              <a:buNone/>
-            </a:pPr>
-            <a:r>
-              <a:rPr lang="en-US" sz="1350" b="1" dirty="0">
-                <a:solidFill>
-                  <a:srgbClr val="333F70"/>
-                </a:solidFill>
-                <a:latin typeface="Unbounded Bold" pitchFamily="34" charset="0"/>
-                <a:ea typeface="Unbounded Bold" pitchFamily="34" charset="-122"/>
-                <a:cs typeface="Unbounded Bold" pitchFamily="34" charset="-120"/>
-              </a:rPr>
-              <a:t>Highest Salary</a:t>
-            </a:r>
-            <a:endParaRPr lang="en-US" sz="1350" dirty="0"/>
-          </a:p>
-        </p:txBody>
-      </p:sp>
-      <p:sp>
-        <p:nvSpPr>
-          <p:cNvPr id="15" name="Text 10"/>
-          <p:cNvSpPr/>
-          <p:nvPr/>
-        </p:nvSpPr>
-        <p:spPr>
-          <a:xfrm>
-            <a:off x="4660553" y="3596642"/>
-            <a:ext cx="1613532" cy="838197"/>
-          </a:xfrm>
-          <a:prstGeom prst="rect">
-            <a:avLst/>
-          </a:prstGeom>
-          <a:noFill/>
-          <a:ln/>
-        </p:spPr>
-        <p:txBody>
-          <a:bodyPr wrap="square" lIns="0" tIns="0" rIns="0" bIns="0" rtlCol="0" anchor="t">
-            <a:normAutofit/>
-          </a:bodyPr>
-          <a:lstStyle/>
-          <a:p>
-            <a:pPr marL="0" indent="0" algn="l">
-              <a:lnSpc>
-                <a:spcPct val="133000"/>
-              </a:lnSpc>
-              <a:buNone/>
-            </a:pPr>
-            <a:r>
-              <a:rPr lang="en-US" sz="1100" dirty="0">
-                <a:solidFill>
-                  <a:srgbClr val="333F70"/>
-                </a:solidFill>
-                <a:latin typeface="Open Sans" pitchFamily="34" charset="0"/>
-                <a:ea typeface="Open Sans" pitchFamily="34" charset="-122"/>
-                <a:cs typeface="Open Sans" pitchFamily="34" charset="-120"/>
-              </a:rPr>
-              <a:t>Highlights the top-earning employee record with full details.</a:t>
-            </a:r>
-            <a:endParaRPr lang="en-US" sz="1100" dirty="0"/>
-          </a:p>
-        </p:txBody>
-      </p:sp>
-      <p:pic>
-        <p:nvPicPr>
-          <p:cNvPr id="16" name="Image 3" descr="preencoded.png"/>
-          <p:cNvPicPr>
-            <a:picLocks noChangeAspect="1"/>
-          </p:cNvPicPr>
-          <p:nvPr/>
-        </p:nvPicPr>
-        <p:blipFill>
-          <a:blip r:embed="rId6"/>
-          <a:stretch>
-            <a:fillRect/>
-          </a:stretch>
-        </p:blipFill>
-        <p:spPr>
-          <a:xfrm>
-            <a:off x="6742806" y="1360465"/>
-            <a:ext cx="1600589" cy="1689712"/>
-          </a:xfrm>
-          <a:prstGeom prst="rect">
-            <a:avLst/>
-          </a:prstGeom>
-        </p:spPr>
-      </p:pic>
-      <p:sp>
-        <p:nvSpPr>
-          <p:cNvPr id="17" name="Text 11"/>
-          <p:cNvSpPr/>
-          <p:nvPr/>
-        </p:nvSpPr>
-        <p:spPr>
-          <a:xfrm>
-            <a:off x="6742807" y="3290132"/>
-            <a:ext cx="1772022" cy="221456"/>
-          </a:xfrm>
-          <a:prstGeom prst="rect">
-            <a:avLst/>
-          </a:prstGeom>
-          <a:noFill/>
-          <a:ln/>
-        </p:spPr>
-        <p:txBody>
-          <a:bodyPr wrap="none" lIns="0" tIns="0" rIns="0" bIns="0" rtlCol="0" anchor="t"/>
-          <a:lstStyle/>
-          <a:p>
-            <a:pPr marL="0" indent="0" algn="l">
-              <a:lnSpc>
-                <a:spcPct val="104000"/>
-              </a:lnSpc>
-              <a:buNone/>
-            </a:pPr>
-            <a:r>
-              <a:rPr lang="en-US" sz="1350" b="1" dirty="0">
-                <a:solidFill>
-                  <a:srgbClr val="333F70"/>
-                </a:solidFill>
-                <a:latin typeface="Unbounded Bold" pitchFamily="34" charset="0"/>
-                <a:ea typeface="Unbounded Bold" pitchFamily="34" charset="-122"/>
-                <a:cs typeface="Unbounded Bold" pitchFamily="34" charset="-120"/>
-              </a:rPr>
-              <a:t>Save Data</a:t>
-            </a:r>
-            <a:endParaRPr lang="en-US" sz="1350" dirty="0"/>
-          </a:p>
-        </p:txBody>
-      </p:sp>
-      <p:sp>
-        <p:nvSpPr>
-          <p:cNvPr id="18" name="Text 12"/>
-          <p:cNvSpPr/>
-          <p:nvPr/>
-        </p:nvSpPr>
-        <p:spPr>
-          <a:xfrm>
-            <a:off x="6742807" y="3596643"/>
-            <a:ext cx="1772022" cy="838196"/>
-          </a:xfrm>
-          <a:prstGeom prst="rect">
-            <a:avLst/>
-          </a:prstGeom>
-          <a:noFill/>
-          <a:ln/>
-        </p:spPr>
-        <p:txBody>
-          <a:bodyPr wrap="square" lIns="0" tIns="0" rIns="0" bIns="0" rtlCol="0" anchor="t">
-            <a:normAutofit/>
-          </a:bodyPr>
-          <a:lstStyle/>
-          <a:p>
-            <a:pPr marL="0" indent="0" algn="l">
-              <a:lnSpc>
-                <a:spcPct val="133000"/>
-              </a:lnSpc>
-              <a:buNone/>
-            </a:pPr>
-            <a:r>
-              <a:rPr lang="en-US" sz="1100" dirty="0">
-                <a:solidFill>
-                  <a:srgbClr val="333F70"/>
-                </a:solidFill>
-                <a:latin typeface="Open Sans" pitchFamily="34" charset="0"/>
-                <a:ea typeface="Open Sans" pitchFamily="34" charset="-122"/>
-                <a:cs typeface="Open Sans" pitchFamily="34" charset="-120"/>
-              </a:rPr>
-              <a:t>Confirms all records were successfully written to data.txt.</a:t>
-            </a:r>
-            <a:endParaRPr lang="en-US" sz="1100" dirty="0"/>
+              <a:rPr lang="en-US" sz="1600" dirty="0"/>
+              <a:t>VIEW ALL</a:t>
+            </a:r>
           </a:p>
         </p:txBody>
       </p:sp>
@@ -10528,6 +10122,231 @@
           <a:p>
             <a:pPr algn="ctr"/>
             <a:endParaRPr lang="en-IN"/>
+          </a:p>
+        </p:txBody>
+      </p:sp>
+      <p:pic>
+        <p:nvPicPr>
+          <p:cNvPr id="4" name="Picture 3">
+            <a:extLst>
+              <a:ext uri="{FF2B5EF4-FFF2-40B4-BE49-F238E27FC236}">
+                <a16:creationId xmlns:a16="http://schemas.microsoft.com/office/drawing/2014/main" id="{FC8B556B-1361-3E78-FD3A-AFD6BE4F873D}"/>
+              </a:ext>
+            </a:extLst>
+          </p:cNvPr>
+          <p:cNvPicPr>
+            <a:picLocks noChangeAspect="1"/>
+          </p:cNvPicPr>
+          <p:nvPr/>
+        </p:nvPicPr>
+        <p:blipFill>
+          <a:blip r:embed="rId3"/>
+          <a:stretch>
+            <a:fillRect/>
+          </a:stretch>
+        </p:blipFill>
+        <p:spPr>
+          <a:xfrm>
+            <a:off x="2429029" y="1468502"/>
+            <a:ext cx="2093960" cy="2642926"/>
+          </a:xfrm>
+          <a:prstGeom prst="rect">
+            <a:avLst/>
+          </a:prstGeom>
+        </p:spPr>
+      </p:pic>
+      <p:pic>
+        <p:nvPicPr>
+          <p:cNvPr id="21" name="Picture 20">
+            <a:extLst>
+              <a:ext uri="{FF2B5EF4-FFF2-40B4-BE49-F238E27FC236}">
+                <a16:creationId xmlns:a16="http://schemas.microsoft.com/office/drawing/2014/main" id="{4B5CD336-4A53-FD2A-9802-E376D44E5A66}"/>
+              </a:ext>
+            </a:extLst>
+          </p:cNvPr>
+          <p:cNvPicPr>
+            <a:picLocks noChangeAspect="1"/>
+          </p:cNvPicPr>
+          <p:nvPr/>
+        </p:nvPicPr>
+        <p:blipFill>
+          <a:blip r:embed="rId4"/>
+          <a:stretch>
+            <a:fillRect/>
+          </a:stretch>
+        </p:blipFill>
+        <p:spPr>
+          <a:xfrm>
+            <a:off x="224526" y="1488569"/>
+            <a:ext cx="1958109" cy="2591020"/>
+          </a:xfrm>
+          <a:prstGeom prst="rect">
+            <a:avLst/>
+          </a:prstGeom>
+        </p:spPr>
+      </p:pic>
+      <p:sp>
+        <p:nvSpPr>
+          <p:cNvPr id="22" name="TextBox 21">
+            <a:extLst>
+              <a:ext uri="{FF2B5EF4-FFF2-40B4-BE49-F238E27FC236}">
+                <a16:creationId xmlns:a16="http://schemas.microsoft.com/office/drawing/2014/main" id="{D322FA36-13E3-AA2C-F488-710FCA36412F}"/>
+              </a:ext>
+            </a:extLst>
+          </p:cNvPr>
+          <p:cNvSpPr txBox="1"/>
+          <p:nvPr/>
+        </p:nvSpPr>
+        <p:spPr>
+          <a:xfrm>
+            <a:off x="496119" y="4256800"/>
+            <a:ext cx="1249060" cy="338554"/>
+          </a:xfrm>
+          <a:prstGeom prst="rect">
+            <a:avLst/>
+          </a:prstGeom>
+          <a:noFill/>
+        </p:spPr>
+        <p:txBody>
+          <a:bodyPr wrap="none" rtlCol="0">
+            <a:spAutoFit/>
+          </a:bodyPr>
+          <a:lstStyle/>
+          <a:p>
+            <a:r>
+              <a:rPr lang="en-US" sz="1600" dirty="0"/>
+              <a:t>MAIN MENU</a:t>
+            </a:r>
+          </a:p>
+        </p:txBody>
+      </p:sp>
+      <p:pic>
+        <p:nvPicPr>
+          <p:cNvPr id="24" name="Picture 23">
+            <a:extLst>
+              <a:ext uri="{FF2B5EF4-FFF2-40B4-BE49-F238E27FC236}">
+                <a16:creationId xmlns:a16="http://schemas.microsoft.com/office/drawing/2014/main" id="{E9B6D111-CF8F-B391-2DC2-2D209C7B5480}"/>
+              </a:ext>
+            </a:extLst>
+          </p:cNvPr>
+          <p:cNvPicPr>
+            <a:picLocks noChangeAspect="1"/>
+          </p:cNvPicPr>
+          <p:nvPr/>
+        </p:nvPicPr>
+        <p:blipFill>
+          <a:blip r:embed="rId5"/>
+          <a:stretch>
+            <a:fillRect/>
+          </a:stretch>
+        </p:blipFill>
+        <p:spPr>
+          <a:xfrm>
+            <a:off x="4831727" y="1376633"/>
+            <a:ext cx="4023519" cy="1120237"/>
+          </a:xfrm>
+          <a:prstGeom prst="rect">
+            <a:avLst/>
+          </a:prstGeom>
+        </p:spPr>
+      </p:pic>
+      <p:sp>
+        <p:nvSpPr>
+          <p:cNvPr id="25" name="TextBox 24">
+            <a:extLst>
+              <a:ext uri="{FF2B5EF4-FFF2-40B4-BE49-F238E27FC236}">
+                <a16:creationId xmlns:a16="http://schemas.microsoft.com/office/drawing/2014/main" id="{28F57438-61F9-AC32-F60A-A63939A68B67}"/>
+              </a:ext>
+            </a:extLst>
+          </p:cNvPr>
+          <p:cNvSpPr txBox="1"/>
+          <p:nvPr/>
+        </p:nvSpPr>
+        <p:spPr>
+          <a:xfrm>
+            <a:off x="6103814" y="974020"/>
+            <a:ext cx="1322157" cy="338554"/>
+          </a:xfrm>
+          <a:prstGeom prst="rect">
+            <a:avLst/>
+          </a:prstGeom>
+          <a:noFill/>
+        </p:spPr>
+        <p:txBody>
+          <a:bodyPr wrap="none" rtlCol="0">
+            <a:spAutoFit/>
+          </a:bodyPr>
+          <a:lstStyle/>
+          <a:p>
+            <a:r>
+              <a:rPr lang="en-IN" sz="1600" dirty="0"/>
+              <a:t>STORED DATA</a:t>
+            </a:r>
+          </a:p>
+        </p:txBody>
+      </p:sp>
+      <p:pic>
+        <p:nvPicPr>
+          <p:cNvPr id="27" name="Picture 26">
+            <a:extLst>
+              <a:ext uri="{FF2B5EF4-FFF2-40B4-BE49-F238E27FC236}">
+                <a16:creationId xmlns:a16="http://schemas.microsoft.com/office/drawing/2014/main" id="{56A36CBB-4E15-553E-44D3-35EC47F63643}"/>
+              </a:ext>
+            </a:extLst>
+          </p:cNvPr>
+          <p:cNvPicPr>
+            <a:picLocks noChangeAspect="1"/>
+          </p:cNvPicPr>
+          <p:nvPr/>
+        </p:nvPicPr>
+        <p:blipFill>
+          <a:blip r:embed="rId6"/>
+          <a:stretch>
+            <a:fillRect/>
+          </a:stretch>
+        </p:blipFill>
+        <p:spPr>
+          <a:xfrm>
+            <a:off x="4902206" y="3033170"/>
+            <a:ext cx="3953040" cy="1800087"/>
+          </a:xfrm>
+          <a:prstGeom prst="rect">
+            <a:avLst/>
+          </a:prstGeom>
+        </p:spPr>
+      </p:pic>
+      <p:sp>
+        <p:nvSpPr>
+          <p:cNvPr id="28" name="TextBox 27">
+            <a:extLst>
+              <a:ext uri="{FF2B5EF4-FFF2-40B4-BE49-F238E27FC236}">
+                <a16:creationId xmlns:a16="http://schemas.microsoft.com/office/drawing/2014/main" id="{D769C8A2-83C1-CBAE-4127-C75C329D22D7}"/>
+              </a:ext>
+            </a:extLst>
+          </p:cNvPr>
+          <p:cNvSpPr txBox="1"/>
+          <p:nvPr/>
+        </p:nvSpPr>
+        <p:spPr>
+          <a:xfrm>
+            <a:off x="6246181" y="2682444"/>
+            <a:ext cx="1265090" cy="338554"/>
+          </a:xfrm>
+          <a:prstGeom prst="rect">
+            <a:avLst/>
+          </a:prstGeom>
+          <a:noFill/>
+        </p:spPr>
+        <p:txBody>
+          <a:bodyPr wrap="none" rtlCol="0">
+            <a:spAutoFit/>
+          </a:bodyPr>
+          <a:lstStyle/>
+          <a:p>
+            <a:r>
+              <a:rPr lang="en-IN" sz="1600" dirty="0"/>
+              <a:t>ADD DETAILS</a:t>
+            </a:r>
           </a:p>
         </p:txBody>
       </p:sp>
